--- a/Mapped Curriculum Lessons/Grade 8/Lesson 28 - Reading 2D Lists/Reading 2D Lists - Slides.pptx
+++ b/Mapped Curriculum Lessons/Grade 8/Lesson 28 - Reading 2D Lists/Reading 2D Lists - Slides.pptx
@@ -2,28 +2,28 @@
 <file path=ppt/presentation.xml><?xml version="1.0" encoding="utf-8"?>
 <p:presentation xmlns:p="http://schemas.openxmlformats.org/presentationml/2006/main" embedTrueTypeFonts="1" saveSubsetFonts="0">
   <p:sldMasterIdLst>
-    <p:sldMasterId xmlns:r="http://schemas.openxmlformats.org/officeDocument/2006/relationships" id="2147483648" r:id="Rbd6209eac9eb4c49"/>
+    <p:sldMasterId xmlns:r="http://schemas.openxmlformats.org/officeDocument/2006/relationships" id="2147483648" r:id="Rc99119d5a86b4531"/>
   </p:sldMasterIdLst>
   <p:notesMasterIdLst>
-    <p:notesMasterId xmlns:r="http://schemas.openxmlformats.org/officeDocument/2006/relationships" r:id="R843f4e81b6934786"/>
+    <p:notesMasterId xmlns:r="http://schemas.openxmlformats.org/officeDocument/2006/relationships" r:id="Rd55432385b3e42db"/>
   </p:notesMasterIdLst>
   <p:sldIdLst>
-    <p:sldId xmlns:r="http://schemas.openxmlformats.org/officeDocument/2006/relationships" id="256" r:id="Rddf73938ff8f4ff7"/>
-    <p:sldId xmlns:r="http://schemas.openxmlformats.org/officeDocument/2006/relationships" id="257" r:id="Rf277733576004678"/>
-    <p:sldId xmlns:r="http://schemas.openxmlformats.org/officeDocument/2006/relationships" id="258" r:id="R5e803b627f4246d3"/>
-    <p:sldId xmlns:r="http://schemas.openxmlformats.org/officeDocument/2006/relationships" id="259" r:id="R98cccc3281f04cd9"/>
-    <p:sldId xmlns:r="http://schemas.openxmlformats.org/officeDocument/2006/relationships" id="260" r:id="R725d814b6b1f47d6"/>
-    <p:sldId xmlns:r="http://schemas.openxmlformats.org/officeDocument/2006/relationships" id="261" r:id="R92fdd37651c74b97"/>
-    <p:sldId xmlns:r="http://schemas.openxmlformats.org/officeDocument/2006/relationships" id="262" r:id="R56071f7cf30140a9"/>
-    <p:sldId xmlns:r="http://schemas.openxmlformats.org/officeDocument/2006/relationships" id="263" r:id="R05f3a7d2672b4a53"/>
-    <p:sldId xmlns:r="http://schemas.openxmlformats.org/officeDocument/2006/relationships" id="264" r:id="Re98d936544ee45cb"/>
+    <p:sldId xmlns:r="http://schemas.openxmlformats.org/officeDocument/2006/relationships" id="256" r:id="R0f8ab2beb0734ad8"/>
+    <p:sldId xmlns:r="http://schemas.openxmlformats.org/officeDocument/2006/relationships" id="257" r:id="R115ef5427d564322"/>
+    <p:sldId xmlns:r="http://schemas.openxmlformats.org/officeDocument/2006/relationships" id="258" r:id="R2779bb75ca4a4879"/>
+    <p:sldId xmlns:r="http://schemas.openxmlformats.org/officeDocument/2006/relationships" id="259" r:id="Rd409569f068f4e1d"/>
+    <p:sldId xmlns:r="http://schemas.openxmlformats.org/officeDocument/2006/relationships" id="260" r:id="R6eb6e72315a64462"/>
+    <p:sldId xmlns:r="http://schemas.openxmlformats.org/officeDocument/2006/relationships" id="261" r:id="Re647735e4beb4c9e"/>
+    <p:sldId xmlns:r="http://schemas.openxmlformats.org/officeDocument/2006/relationships" id="262" r:id="R2d624392985e4068"/>
+    <p:sldId xmlns:r="http://schemas.openxmlformats.org/officeDocument/2006/relationships" id="263" r:id="R23c56e789d1f4044"/>
+    <p:sldId xmlns:r="http://schemas.openxmlformats.org/officeDocument/2006/relationships" id="264" r:id="Rbaf3e7852fdd4055"/>
   </p:sldIdLst>
   <p:sldSz cx="12192000" cy="6858000"/>
   <p:notesSz cx="6858000" cy="9144000"/>
   <p:embeddedFontLst>
     <p:embeddedFont>
       <p:font typeface="JetBrains Mono"/>
-      <p:regular xmlns:r="http://schemas.openxmlformats.org/officeDocument/2006/relationships" r:id="R59b68f7499c44771"/>
+      <p:regular xmlns:r="http://schemas.openxmlformats.org/officeDocument/2006/relationships" r:id="Ref2908d1ea404196"/>
     </p:embeddedFont>
   </p:embeddedFontLst>
 </p:presentation>
@@ -1071,7 +1071,7 @@
           <p:nvPr/>
         </p:nvPicPr>
         <p:blipFill rotWithShape="1">
-          <a:blip xmlns:r="http://schemas.openxmlformats.org/officeDocument/2006/relationships" xmlns:a="http://schemas.openxmlformats.org/drawingml/2006/main" r:embed="R5dfd30151eae4e0e"/>
+          <a:blip xmlns:r="http://schemas.openxmlformats.org/officeDocument/2006/relationships" xmlns:a="http://schemas.openxmlformats.org/drawingml/2006/main" r:embed="R7adb47ed234d46b7"/>
           <a:stretch xmlns:a="http://schemas.openxmlformats.org/drawingml/2006/main"/>
         </p:blipFill>
         <p:spPr>
@@ -1451,7 +1451,7 @@
           <p:nvPr/>
         </p:nvPicPr>
         <p:blipFill rotWithShape="1">
-          <a:blip xmlns:r="http://schemas.openxmlformats.org/officeDocument/2006/relationships" xmlns:a="http://schemas.openxmlformats.org/drawingml/2006/main" r:embed="Rf72ccba762b64e07">
+          <a:blip xmlns:r="http://schemas.openxmlformats.org/officeDocument/2006/relationships" xmlns:a="http://schemas.openxmlformats.org/drawingml/2006/main" r:embed="R9809eacf1bc641fe">
             <a:alphaModFix amt="28000"/>
           </a:blip>
           <a:stretch xmlns:a="http://schemas.openxmlformats.org/drawingml/2006/main"/>
@@ -1664,7 +1664,7 @@
           <p:nvPr/>
         </p:nvPicPr>
         <p:blipFill rotWithShape="1">
-          <a:blip xmlns:r="http://schemas.openxmlformats.org/officeDocument/2006/relationships" xmlns:a="http://schemas.openxmlformats.org/drawingml/2006/main" r:embed="R3618e44264324219">
+          <a:blip xmlns:r="http://schemas.openxmlformats.org/officeDocument/2006/relationships" xmlns:a="http://schemas.openxmlformats.org/drawingml/2006/main" r:embed="R67c4176f81a74c62">
             <a:alphaModFix amt="28000"/>
           </a:blip>
           <a:stretch xmlns:a="http://schemas.openxmlformats.org/drawingml/2006/main"/>
@@ -1899,7 +1899,7 @@
           <p:nvPr/>
         </p:nvPicPr>
         <p:blipFill rotWithShape="1">
-          <a:blip xmlns:r="http://schemas.openxmlformats.org/officeDocument/2006/relationships" xmlns:a="http://schemas.openxmlformats.org/drawingml/2006/main" r:embed="R9e0d1565ca714587">
+          <a:blip xmlns:r="http://schemas.openxmlformats.org/officeDocument/2006/relationships" xmlns:a="http://schemas.openxmlformats.org/drawingml/2006/main" r:embed="R6dc86243b6e54e90">
             <a:alphaModFix amt="28000"/>
           </a:blip>
           <a:stretch xmlns:a="http://schemas.openxmlformats.org/drawingml/2006/main"/>
@@ -2176,7 +2176,7 @@
           <p:nvPr/>
         </p:nvPicPr>
         <p:blipFill rotWithShape="1">
-          <a:blip xmlns:r="http://schemas.openxmlformats.org/officeDocument/2006/relationships" xmlns:a="http://schemas.openxmlformats.org/drawingml/2006/main" r:embed="R01e8be34663149f8">
+          <a:blip xmlns:r="http://schemas.openxmlformats.org/officeDocument/2006/relationships" xmlns:a="http://schemas.openxmlformats.org/drawingml/2006/main" r:embed="Ra43a97f1b38c4471">
             <a:alphaModFix amt="28000"/>
           </a:blip>
           <a:stretch xmlns:a="http://schemas.openxmlformats.org/drawingml/2006/main"/>
@@ -2451,7 +2451,7 @@
           <p:nvPr/>
         </p:nvPicPr>
         <p:blipFill rotWithShape="1">
-          <a:blip xmlns:r="http://schemas.openxmlformats.org/officeDocument/2006/relationships" xmlns:a="http://schemas.openxmlformats.org/drawingml/2006/main" r:embed="R7b8dc22468884fc1">
+          <a:blip xmlns:r="http://schemas.openxmlformats.org/officeDocument/2006/relationships" xmlns:a="http://schemas.openxmlformats.org/drawingml/2006/main" r:embed="Rc2c1af032f384c3b">
             <a:alphaModFix amt="28000"/>
           </a:blip>
           <a:stretch xmlns:a="http://schemas.openxmlformats.org/drawingml/2006/main"/>
@@ -2875,7 +2875,7 @@
           <p:nvPr/>
         </p:nvPicPr>
         <p:blipFill rotWithShape="1">
-          <a:blip xmlns:r="http://schemas.openxmlformats.org/officeDocument/2006/relationships" xmlns:a="http://schemas.openxmlformats.org/drawingml/2006/main" r:embed="R87aec1c8746e4845">
+          <a:blip xmlns:r="http://schemas.openxmlformats.org/officeDocument/2006/relationships" xmlns:a="http://schemas.openxmlformats.org/drawingml/2006/main" r:embed="R82fa90f377a540d7">
             <a:alphaModFix amt="28000"/>
           </a:blip>
           <a:stretch xmlns:a="http://schemas.openxmlformats.org/drawingml/2006/main"/>
@@ -3016,7 +3016,7 @@
           <p:nvPr/>
         </p:nvPicPr>
         <p:blipFill rotWithShape="1">
-          <a:blip xmlns:r="http://schemas.openxmlformats.org/officeDocument/2006/relationships" xmlns:a="http://schemas.openxmlformats.org/drawingml/2006/main" r:embed="R767c909684ff4e9d">
+          <a:blip xmlns:r="http://schemas.openxmlformats.org/officeDocument/2006/relationships" xmlns:a="http://schemas.openxmlformats.org/drawingml/2006/main" r:embed="R4cc996bb4470403f">
             <a:alphaModFix amt="28000"/>
           </a:blip>
           <a:stretch xmlns:a="http://schemas.openxmlformats.org/drawingml/2006/main"/>
@@ -3130,7 +3130,7 @@
           <p:nvPr/>
         </p:nvPicPr>
         <p:blipFill rotWithShape="1">
-          <a:blip xmlns:r="http://schemas.openxmlformats.org/officeDocument/2006/relationships" xmlns:a="http://schemas.openxmlformats.org/drawingml/2006/main" r:embed="Rc53dc57a09fa4967">
+          <a:blip xmlns:r="http://schemas.openxmlformats.org/officeDocument/2006/relationships" xmlns:a="http://schemas.openxmlformats.org/drawingml/2006/main" r:embed="Rffe3cea7d8024395">
             <a:alphaModFix amt="28000"/>
           </a:blip>
           <a:stretch xmlns:a="http://schemas.openxmlformats.org/drawingml/2006/main"/>
@@ -3457,7 +3457,7 @@
           <p:nvPr/>
         </p:nvPicPr>
         <p:blipFill rotWithShape="1">
-          <a:blip xmlns:r="http://schemas.openxmlformats.org/officeDocument/2006/relationships" xmlns:a="http://schemas.openxmlformats.org/drawingml/2006/main" r:embed="Rdba01ed2509f490c">
+          <a:blip xmlns:r="http://schemas.openxmlformats.org/officeDocument/2006/relationships" xmlns:a="http://schemas.openxmlformats.org/drawingml/2006/main" r:embed="R350fee154df444a2">
             <a:alphaModFix amt="28000"/>
           </a:blip>
           <a:stretch xmlns:a="http://schemas.openxmlformats.org/drawingml/2006/main"/>
@@ -3745,7 +3745,7 @@
           <p:nvPr/>
         </p:nvPicPr>
         <p:blipFill rotWithShape="1">
-          <a:blip xmlns:r="http://schemas.openxmlformats.org/officeDocument/2006/relationships" xmlns:a="http://schemas.openxmlformats.org/drawingml/2006/main" r:embed="Rc362e7973a494d2c">
+          <a:blip xmlns:r="http://schemas.openxmlformats.org/officeDocument/2006/relationships" xmlns:a="http://schemas.openxmlformats.org/drawingml/2006/main" r:embed="R342a81e0b23b4aab">
             <a:alphaModFix amt="28000"/>
           </a:blip>
           <a:stretch xmlns:a="http://schemas.openxmlformats.org/drawingml/2006/main"/>
@@ -3982,17 +3982,17 @@
   </p:cSld>
   <p:clrMap bg1="lt1" tx1="dk1" bg2="lt2" tx2="dk2" accent1="accent1" accent2="accent2" accent3="accent3" accent4="accent4" accent5="accent5" accent6="accent6" hlink="hlink" folHlink="folHlink"/>
   <p:sldLayoutIdLst>
-    <p:sldLayoutId xmlns:r="http://schemas.openxmlformats.org/officeDocument/2006/relationships" id="2147483649" r:id="R43124568302f4d68"/>
-    <p:sldLayoutId xmlns:r="http://schemas.openxmlformats.org/officeDocument/2006/relationships" id="2147483650" r:id="R578a1c6bcd304f96"/>
-    <p:sldLayoutId xmlns:r="http://schemas.openxmlformats.org/officeDocument/2006/relationships" id="2147483651" r:id="R18aaf151c945497c"/>
-    <p:sldLayoutId xmlns:r="http://schemas.openxmlformats.org/officeDocument/2006/relationships" id="2147483652" r:id="R9ee4de106eef4dd8"/>
-    <p:sldLayoutId xmlns:r="http://schemas.openxmlformats.org/officeDocument/2006/relationships" id="2147483653" r:id="R9911b232af284c25"/>
-    <p:sldLayoutId xmlns:r="http://schemas.openxmlformats.org/officeDocument/2006/relationships" id="2147483654" r:id="Rbbffb60e960c4734"/>
-    <p:sldLayoutId xmlns:r="http://schemas.openxmlformats.org/officeDocument/2006/relationships" id="2147483655" r:id="R0a0688483f164d20"/>
-    <p:sldLayoutId xmlns:r="http://schemas.openxmlformats.org/officeDocument/2006/relationships" id="2147483656" r:id="R4ab52376423147e0"/>
-    <p:sldLayoutId xmlns:r="http://schemas.openxmlformats.org/officeDocument/2006/relationships" id="2147483657" r:id="R8ee8c0b4d5434b10"/>
-    <p:sldLayoutId xmlns:r="http://schemas.openxmlformats.org/officeDocument/2006/relationships" id="2147483658" r:id="R7b42385e0fb14990"/>
-    <p:sldLayoutId xmlns:r="http://schemas.openxmlformats.org/officeDocument/2006/relationships" id="2147483659" r:id="Rabfda944d1154aa1"/>
+    <p:sldLayoutId xmlns:r="http://schemas.openxmlformats.org/officeDocument/2006/relationships" id="2147483649" r:id="R14d6a19aec1246a3"/>
+    <p:sldLayoutId xmlns:r="http://schemas.openxmlformats.org/officeDocument/2006/relationships" id="2147483650" r:id="R6696f790273c4103"/>
+    <p:sldLayoutId xmlns:r="http://schemas.openxmlformats.org/officeDocument/2006/relationships" id="2147483651" r:id="R052cbf0a6251410f"/>
+    <p:sldLayoutId xmlns:r="http://schemas.openxmlformats.org/officeDocument/2006/relationships" id="2147483652" r:id="R57f3786e7c2c4c21"/>
+    <p:sldLayoutId xmlns:r="http://schemas.openxmlformats.org/officeDocument/2006/relationships" id="2147483653" r:id="Rcde39da9ef094ec3"/>
+    <p:sldLayoutId xmlns:r="http://schemas.openxmlformats.org/officeDocument/2006/relationships" id="2147483654" r:id="R41717a91ceb04a90"/>
+    <p:sldLayoutId xmlns:r="http://schemas.openxmlformats.org/officeDocument/2006/relationships" id="2147483655" r:id="Rcd9d740bc8b44d9b"/>
+    <p:sldLayoutId xmlns:r="http://schemas.openxmlformats.org/officeDocument/2006/relationships" id="2147483656" r:id="R7e2c000eff284a6e"/>
+    <p:sldLayoutId xmlns:r="http://schemas.openxmlformats.org/officeDocument/2006/relationships" id="2147483657" r:id="R193fc18f8801404a"/>
+    <p:sldLayoutId xmlns:r="http://schemas.openxmlformats.org/officeDocument/2006/relationships" id="2147483658" r:id="Rb4fea8d289714aab"/>
+    <p:sldLayoutId xmlns:r="http://schemas.openxmlformats.org/officeDocument/2006/relationships" id="2147483659" r:id="Rfd02d356bda543a5"/>
   </p:sldLayoutIdLst>
   <p:hf hdr="0" ftr="0" dt="0"/>
   <p:txStyles>

--- a/Mapped Curriculum Lessons/Grade 8/Lesson 28 - Reading 2D Lists/Reading 2D Lists - Slides.pptx
+++ b/Mapped Curriculum Lessons/Grade 8/Lesson 28 - Reading 2D Lists/Reading 2D Lists - Slides.pptx
@@ -2,28 +2,28 @@
 <file path=ppt/presentation.xml><?xml version="1.0" encoding="utf-8"?>
 <p:presentation xmlns:p="http://schemas.openxmlformats.org/presentationml/2006/main" embedTrueTypeFonts="1" saveSubsetFonts="0">
   <p:sldMasterIdLst>
-    <p:sldMasterId xmlns:r="http://schemas.openxmlformats.org/officeDocument/2006/relationships" id="2147483648" r:id="Rc99119d5a86b4531"/>
+    <p:sldMasterId xmlns:r="http://schemas.openxmlformats.org/officeDocument/2006/relationships" id="2147483648" r:id="R871ae38a6df447f4"/>
   </p:sldMasterIdLst>
   <p:notesMasterIdLst>
-    <p:notesMasterId xmlns:r="http://schemas.openxmlformats.org/officeDocument/2006/relationships" r:id="Rd55432385b3e42db"/>
+    <p:notesMasterId xmlns:r="http://schemas.openxmlformats.org/officeDocument/2006/relationships" r:id="R2f2db57f27984030"/>
   </p:notesMasterIdLst>
   <p:sldIdLst>
-    <p:sldId xmlns:r="http://schemas.openxmlformats.org/officeDocument/2006/relationships" id="256" r:id="R0f8ab2beb0734ad8"/>
-    <p:sldId xmlns:r="http://schemas.openxmlformats.org/officeDocument/2006/relationships" id="257" r:id="R115ef5427d564322"/>
-    <p:sldId xmlns:r="http://schemas.openxmlformats.org/officeDocument/2006/relationships" id="258" r:id="R2779bb75ca4a4879"/>
-    <p:sldId xmlns:r="http://schemas.openxmlformats.org/officeDocument/2006/relationships" id="259" r:id="Rd409569f068f4e1d"/>
-    <p:sldId xmlns:r="http://schemas.openxmlformats.org/officeDocument/2006/relationships" id="260" r:id="R6eb6e72315a64462"/>
-    <p:sldId xmlns:r="http://schemas.openxmlformats.org/officeDocument/2006/relationships" id="261" r:id="Re647735e4beb4c9e"/>
-    <p:sldId xmlns:r="http://schemas.openxmlformats.org/officeDocument/2006/relationships" id="262" r:id="R2d624392985e4068"/>
-    <p:sldId xmlns:r="http://schemas.openxmlformats.org/officeDocument/2006/relationships" id="263" r:id="R23c56e789d1f4044"/>
-    <p:sldId xmlns:r="http://schemas.openxmlformats.org/officeDocument/2006/relationships" id="264" r:id="Rbaf3e7852fdd4055"/>
+    <p:sldId xmlns:r="http://schemas.openxmlformats.org/officeDocument/2006/relationships" id="256" r:id="R2ab3ca78033b4c3a"/>
+    <p:sldId xmlns:r="http://schemas.openxmlformats.org/officeDocument/2006/relationships" id="257" r:id="Rd09f29db3ada473f"/>
+    <p:sldId xmlns:r="http://schemas.openxmlformats.org/officeDocument/2006/relationships" id="258" r:id="R4a7c9f49ef1f429e"/>
+    <p:sldId xmlns:r="http://schemas.openxmlformats.org/officeDocument/2006/relationships" id="259" r:id="R64ad382d401d48fd"/>
+    <p:sldId xmlns:r="http://schemas.openxmlformats.org/officeDocument/2006/relationships" id="260" r:id="R49cb517d719c44ca"/>
+    <p:sldId xmlns:r="http://schemas.openxmlformats.org/officeDocument/2006/relationships" id="261" r:id="R35ed22180e68429c"/>
+    <p:sldId xmlns:r="http://schemas.openxmlformats.org/officeDocument/2006/relationships" id="262" r:id="R3b5bf6b9c9f14c19"/>
+    <p:sldId xmlns:r="http://schemas.openxmlformats.org/officeDocument/2006/relationships" id="263" r:id="R570fc673b4ee4446"/>
+    <p:sldId xmlns:r="http://schemas.openxmlformats.org/officeDocument/2006/relationships" id="264" r:id="R12a687ab001240af"/>
   </p:sldIdLst>
   <p:sldSz cx="12192000" cy="6858000"/>
   <p:notesSz cx="6858000" cy="9144000"/>
   <p:embeddedFontLst>
     <p:embeddedFont>
       <p:font typeface="JetBrains Mono"/>
-      <p:regular xmlns:r="http://schemas.openxmlformats.org/officeDocument/2006/relationships" r:id="Ref2908d1ea404196"/>
+      <p:regular xmlns:r="http://schemas.openxmlformats.org/officeDocument/2006/relationships" r:id="R40591800a5994540"/>
     </p:embeddedFont>
   </p:embeddedFontLst>
 </p:presentation>
@@ -1071,7 +1071,7 @@
           <p:nvPr/>
         </p:nvPicPr>
         <p:blipFill rotWithShape="1">
-          <a:blip xmlns:r="http://schemas.openxmlformats.org/officeDocument/2006/relationships" xmlns:a="http://schemas.openxmlformats.org/drawingml/2006/main" r:embed="R7adb47ed234d46b7"/>
+          <a:blip xmlns:r="http://schemas.openxmlformats.org/officeDocument/2006/relationships" xmlns:a="http://schemas.openxmlformats.org/drawingml/2006/main" r:embed="Rda029ea8b90649dc"/>
           <a:stretch xmlns:a="http://schemas.openxmlformats.org/drawingml/2006/main"/>
         </p:blipFill>
         <p:spPr>
@@ -1451,7 +1451,7 @@
           <p:nvPr/>
         </p:nvPicPr>
         <p:blipFill rotWithShape="1">
-          <a:blip xmlns:r="http://schemas.openxmlformats.org/officeDocument/2006/relationships" xmlns:a="http://schemas.openxmlformats.org/drawingml/2006/main" r:embed="R9809eacf1bc641fe">
+          <a:blip xmlns:r="http://schemas.openxmlformats.org/officeDocument/2006/relationships" xmlns:a="http://schemas.openxmlformats.org/drawingml/2006/main" r:embed="Re06170297c8e4706">
             <a:alphaModFix amt="28000"/>
           </a:blip>
           <a:stretch xmlns:a="http://schemas.openxmlformats.org/drawingml/2006/main"/>
@@ -1664,7 +1664,7 @@
           <p:nvPr/>
         </p:nvPicPr>
         <p:blipFill rotWithShape="1">
-          <a:blip xmlns:r="http://schemas.openxmlformats.org/officeDocument/2006/relationships" xmlns:a="http://schemas.openxmlformats.org/drawingml/2006/main" r:embed="R67c4176f81a74c62">
+          <a:blip xmlns:r="http://schemas.openxmlformats.org/officeDocument/2006/relationships" xmlns:a="http://schemas.openxmlformats.org/drawingml/2006/main" r:embed="R6e94438d69c8471e">
             <a:alphaModFix amt="28000"/>
           </a:blip>
           <a:stretch xmlns:a="http://schemas.openxmlformats.org/drawingml/2006/main"/>
@@ -1899,7 +1899,7 @@
           <p:nvPr/>
         </p:nvPicPr>
         <p:blipFill rotWithShape="1">
-          <a:blip xmlns:r="http://schemas.openxmlformats.org/officeDocument/2006/relationships" xmlns:a="http://schemas.openxmlformats.org/drawingml/2006/main" r:embed="R6dc86243b6e54e90">
+          <a:blip xmlns:r="http://schemas.openxmlformats.org/officeDocument/2006/relationships" xmlns:a="http://schemas.openxmlformats.org/drawingml/2006/main" r:embed="Rb33bb4a8edbc4763">
             <a:alphaModFix amt="28000"/>
           </a:blip>
           <a:stretch xmlns:a="http://schemas.openxmlformats.org/drawingml/2006/main"/>
@@ -2176,7 +2176,7 @@
           <p:nvPr/>
         </p:nvPicPr>
         <p:blipFill rotWithShape="1">
-          <a:blip xmlns:r="http://schemas.openxmlformats.org/officeDocument/2006/relationships" xmlns:a="http://schemas.openxmlformats.org/drawingml/2006/main" r:embed="Ra43a97f1b38c4471">
+          <a:blip xmlns:r="http://schemas.openxmlformats.org/officeDocument/2006/relationships" xmlns:a="http://schemas.openxmlformats.org/drawingml/2006/main" r:embed="R21020845d4cb42a8">
             <a:alphaModFix amt="28000"/>
           </a:blip>
           <a:stretch xmlns:a="http://schemas.openxmlformats.org/drawingml/2006/main"/>
@@ -2451,7 +2451,7 @@
           <p:nvPr/>
         </p:nvPicPr>
         <p:blipFill rotWithShape="1">
-          <a:blip xmlns:r="http://schemas.openxmlformats.org/officeDocument/2006/relationships" xmlns:a="http://schemas.openxmlformats.org/drawingml/2006/main" r:embed="Rc2c1af032f384c3b">
+          <a:blip xmlns:r="http://schemas.openxmlformats.org/officeDocument/2006/relationships" xmlns:a="http://schemas.openxmlformats.org/drawingml/2006/main" r:embed="R0e7d4e7ae00d4d64">
             <a:alphaModFix amt="28000"/>
           </a:blip>
           <a:stretch xmlns:a="http://schemas.openxmlformats.org/drawingml/2006/main"/>
@@ -2875,7 +2875,7 @@
           <p:nvPr/>
         </p:nvPicPr>
         <p:blipFill rotWithShape="1">
-          <a:blip xmlns:r="http://schemas.openxmlformats.org/officeDocument/2006/relationships" xmlns:a="http://schemas.openxmlformats.org/drawingml/2006/main" r:embed="R82fa90f377a540d7">
+          <a:blip xmlns:r="http://schemas.openxmlformats.org/officeDocument/2006/relationships" xmlns:a="http://schemas.openxmlformats.org/drawingml/2006/main" r:embed="R0e6ed1f13b7f493d">
             <a:alphaModFix amt="28000"/>
           </a:blip>
           <a:stretch xmlns:a="http://schemas.openxmlformats.org/drawingml/2006/main"/>
@@ -3016,7 +3016,7 @@
           <p:nvPr/>
         </p:nvPicPr>
         <p:blipFill rotWithShape="1">
-          <a:blip xmlns:r="http://schemas.openxmlformats.org/officeDocument/2006/relationships" xmlns:a="http://schemas.openxmlformats.org/drawingml/2006/main" r:embed="R4cc996bb4470403f">
+          <a:blip xmlns:r="http://schemas.openxmlformats.org/officeDocument/2006/relationships" xmlns:a="http://schemas.openxmlformats.org/drawingml/2006/main" r:embed="R8b12489b7e62401b">
             <a:alphaModFix amt="28000"/>
           </a:blip>
           <a:stretch xmlns:a="http://schemas.openxmlformats.org/drawingml/2006/main"/>
@@ -3130,7 +3130,7 @@
           <p:nvPr/>
         </p:nvPicPr>
         <p:blipFill rotWithShape="1">
-          <a:blip xmlns:r="http://schemas.openxmlformats.org/officeDocument/2006/relationships" xmlns:a="http://schemas.openxmlformats.org/drawingml/2006/main" r:embed="Rffe3cea7d8024395">
+          <a:blip xmlns:r="http://schemas.openxmlformats.org/officeDocument/2006/relationships" xmlns:a="http://schemas.openxmlformats.org/drawingml/2006/main" r:embed="Rc319e24d17394ffa">
             <a:alphaModFix amt="28000"/>
           </a:blip>
           <a:stretch xmlns:a="http://schemas.openxmlformats.org/drawingml/2006/main"/>
@@ -3457,7 +3457,7 @@
           <p:nvPr/>
         </p:nvPicPr>
         <p:blipFill rotWithShape="1">
-          <a:blip xmlns:r="http://schemas.openxmlformats.org/officeDocument/2006/relationships" xmlns:a="http://schemas.openxmlformats.org/drawingml/2006/main" r:embed="R350fee154df444a2">
+          <a:blip xmlns:r="http://schemas.openxmlformats.org/officeDocument/2006/relationships" xmlns:a="http://schemas.openxmlformats.org/drawingml/2006/main" r:embed="R212cbf78584240ac">
             <a:alphaModFix amt="28000"/>
           </a:blip>
           <a:stretch xmlns:a="http://schemas.openxmlformats.org/drawingml/2006/main"/>
@@ -3745,7 +3745,7 @@
           <p:nvPr/>
         </p:nvPicPr>
         <p:blipFill rotWithShape="1">
-          <a:blip xmlns:r="http://schemas.openxmlformats.org/officeDocument/2006/relationships" xmlns:a="http://schemas.openxmlformats.org/drawingml/2006/main" r:embed="R342a81e0b23b4aab">
+          <a:blip xmlns:r="http://schemas.openxmlformats.org/officeDocument/2006/relationships" xmlns:a="http://schemas.openxmlformats.org/drawingml/2006/main" r:embed="R63d97b639ee347c0">
             <a:alphaModFix amt="28000"/>
           </a:blip>
           <a:stretch xmlns:a="http://schemas.openxmlformats.org/drawingml/2006/main"/>
@@ -3982,17 +3982,17 @@
   </p:cSld>
   <p:clrMap bg1="lt1" tx1="dk1" bg2="lt2" tx2="dk2" accent1="accent1" accent2="accent2" accent3="accent3" accent4="accent4" accent5="accent5" accent6="accent6" hlink="hlink" folHlink="folHlink"/>
   <p:sldLayoutIdLst>
-    <p:sldLayoutId xmlns:r="http://schemas.openxmlformats.org/officeDocument/2006/relationships" id="2147483649" r:id="R14d6a19aec1246a3"/>
-    <p:sldLayoutId xmlns:r="http://schemas.openxmlformats.org/officeDocument/2006/relationships" id="2147483650" r:id="R6696f790273c4103"/>
-    <p:sldLayoutId xmlns:r="http://schemas.openxmlformats.org/officeDocument/2006/relationships" id="2147483651" r:id="R052cbf0a6251410f"/>
-    <p:sldLayoutId xmlns:r="http://schemas.openxmlformats.org/officeDocument/2006/relationships" id="2147483652" r:id="R57f3786e7c2c4c21"/>
-    <p:sldLayoutId xmlns:r="http://schemas.openxmlformats.org/officeDocument/2006/relationships" id="2147483653" r:id="Rcde39da9ef094ec3"/>
-    <p:sldLayoutId xmlns:r="http://schemas.openxmlformats.org/officeDocument/2006/relationships" id="2147483654" r:id="R41717a91ceb04a90"/>
-    <p:sldLayoutId xmlns:r="http://schemas.openxmlformats.org/officeDocument/2006/relationships" id="2147483655" r:id="Rcd9d740bc8b44d9b"/>
-    <p:sldLayoutId xmlns:r="http://schemas.openxmlformats.org/officeDocument/2006/relationships" id="2147483656" r:id="R7e2c000eff284a6e"/>
-    <p:sldLayoutId xmlns:r="http://schemas.openxmlformats.org/officeDocument/2006/relationships" id="2147483657" r:id="R193fc18f8801404a"/>
-    <p:sldLayoutId xmlns:r="http://schemas.openxmlformats.org/officeDocument/2006/relationships" id="2147483658" r:id="Rb4fea8d289714aab"/>
-    <p:sldLayoutId xmlns:r="http://schemas.openxmlformats.org/officeDocument/2006/relationships" id="2147483659" r:id="Rfd02d356bda543a5"/>
+    <p:sldLayoutId xmlns:r="http://schemas.openxmlformats.org/officeDocument/2006/relationships" id="2147483649" r:id="R4ff4a728008f4916"/>
+    <p:sldLayoutId xmlns:r="http://schemas.openxmlformats.org/officeDocument/2006/relationships" id="2147483650" r:id="Rc8ef249ed6e6416c"/>
+    <p:sldLayoutId xmlns:r="http://schemas.openxmlformats.org/officeDocument/2006/relationships" id="2147483651" r:id="R2cc6c2924ff14991"/>
+    <p:sldLayoutId xmlns:r="http://schemas.openxmlformats.org/officeDocument/2006/relationships" id="2147483652" r:id="R6e09269cd3e9419d"/>
+    <p:sldLayoutId xmlns:r="http://schemas.openxmlformats.org/officeDocument/2006/relationships" id="2147483653" r:id="Ra5fa3c9a4287446c"/>
+    <p:sldLayoutId xmlns:r="http://schemas.openxmlformats.org/officeDocument/2006/relationships" id="2147483654" r:id="Rc9a6d0983eae41f5"/>
+    <p:sldLayoutId xmlns:r="http://schemas.openxmlformats.org/officeDocument/2006/relationships" id="2147483655" r:id="R89d17f6490094342"/>
+    <p:sldLayoutId xmlns:r="http://schemas.openxmlformats.org/officeDocument/2006/relationships" id="2147483656" r:id="Ra0cec4891bc14c16"/>
+    <p:sldLayoutId xmlns:r="http://schemas.openxmlformats.org/officeDocument/2006/relationships" id="2147483657" r:id="R25cdb7474bea4789"/>
+    <p:sldLayoutId xmlns:r="http://schemas.openxmlformats.org/officeDocument/2006/relationships" id="2147483658" r:id="R723dfb598bcf4818"/>
+    <p:sldLayoutId xmlns:r="http://schemas.openxmlformats.org/officeDocument/2006/relationships" id="2147483659" r:id="Rab77bc0621324511"/>
   </p:sldLayoutIdLst>
   <p:hf hdr="0" ftr="0" dt="0"/>
   <p:txStyles>
@@ -8087,7 +8087,7 @@
         </p:spPr>
         <p:txBody>
           <a:bodyPr xmlns:a="http://schemas.openxmlformats.org/drawingml/2006/main">
-            <a:normAutofit fontScale="100000"/>
+            <a:normAutofit fontScale="99952"/>
           </a:bodyPr>
           <a:lstStyle xmlns:a="http://schemas.openxmlformats.org/drawingml/2006/main"/>
           <a:p xmlns:a="http://schemas.openxmlformats.org/drawingml/2006/main">
@@ -8106,7 +8106,95 @@
                 <a:ea typeface="Calibri"/>
                 <a:cs typeface="Calibri"/>
               </a:rPr>
-              <a:t>Traverse every row and display each club name followed by its member count. Do not print the row brackets.</a:t>
+              <a:t>Use a </a:t>
+            </a:r>
+            <a:r>
+              <a:rPr sz="2400" b="0">
+                <a:solidFill>
+                  <a:srgbClr val="1750EB"/>
+                </a:solidFill>
+                <a:latin typeface="JetBrains Mono"/>
+                <a:ea typeface="JetBrains Mono"/>
+                <a:cs typeface="JetBrains Mono"/>
+              </a:rPr>
+              <a:t>for</a:t>
+            </a:r>
+            <a:r>
+              <a:rPr sz="2400" b="0">
+                <a:solidFill>
+                  <a:srgbClr val="080808"/>
+                </a:solidFill>
+                <a:latin typeface="Calibri"/>
+                <a:ea typeface="Calibri"/>
+                <a:cs typeface="Calibri"/>
+              </a:rPr>
+              <a:t> loop to visit each row in [clubs]. For each [club], display </a:t>
+            </a:r>
+            <a:r>
+              <a:rPr sz="2400" b="0">
+                <a:solidFill>
+                  <a:srgbClr val="067D17"/>
+                </a:solidFill>
+                <a:latin typeface="JetBrains Mono"/>
+                <a:ea typeface="JetBrains Mono"/>
+                <a:cs typeface="JetBrains Mono"/>
+              </a:rPr>
+              <a:t>"Club:"</a:t>
+            </a:r>
+            <a:r>
+              <a:rPr sz="2400" b="0">
+                <a:solidFill>
+                  <a:srgbClr val="080808"/>
+                </a:solidFill>
+                <a:latin typeface="Calibri"/>
+                <a:ea typeface="Calibri"/>
+                <a:cs typeface="Calibri"/>
+              </a:rPr>
+              <a:t> followed by the value at position 0, then display </a:t>
+            </a:r>
+            <a:r>
+              <a:rPr sz="2400" b="0">
+                <a:solidFill>
+                  <a:srgbClr val="067D17"/>
+                </a:solidFill>
+                <a:latin typeface="JetBrains Mono"/>
+                <a:ea typeface="JetBrains Mono"/>
+                <a:cs typeface="JetBrains Mono"/>
+              </a:rPr>
+              <a:t>"Members:"</a:t>
+            </a:r>
+            <a:r>
+              <a:rPr sz="2400" b="0">
+                <a:solidFill>
+                  <a:srgbClr val="080808"/>
+                </a:solidFill>
+                <a:latin typeface="Calibri"/>
+                <a:ea typeface="Calibri"/>
+                <a:cs typeface="Calibri"/>
+              </a:rPr>
+              <a:t> followed by the value at position 1. The starter data must display Art with 12 members, Chess with 18 members and Code with 15 members without displaying </a:t>
+            </a:r>
+            <a:r>
+              <a:rPr sz="2400" b="0">
+                <a:solidFill>
+                  <a:srgbClr val="1750EB"/>
+                </a:solidFill>
+                <a:latin typeface="JetBrains Mono"/>
+                <a:ea typeface="JetBrains Mono"/>
+                <a:cs typeface="JetBrains Mono"/>
+              </a:rPr>
+              <a:t>list</a:t>
+            </a:r>
+            <a:r>
+              <a:rPr sz="2400" b="0">
+                <a:solidFill>
+                  <a:srgbClr val="080808"/>
+                </a:solidFill>
+                <a:latin typeface="Calibri"/>
+                <a:ea typeface="Calibri"/>
+                <a:cs typeface="Calibri"/>
+              </a:rPr>
+              <a:t> brackets.</a:t>
             </a:r>
           </a:p>
         </p:txBody>
@@ -8788,7 +8876,7 @@
         </p:spPr>
         <p:txBody>
           <a:bodyPr xmlns:a="http://schemas.openxmlformats.org/drawingml/2006/main">
-            <a:normAutofit fontScale="100000"/>
+            <a:normAutofit fontScale="87835"/>
           </a:bodyPr>
           <a:lstStyle xmlns:a="http://schemas.openxmlformats.org/drawingml/2006/main"/>
           <a:p xmlns:a="http://schemas.openxmlformats.org/drawingml/2006/main">
@@ -8807,7 +8895,183 @@
                 <a:ea typeface="Calibri"/>
                 <a:cs typeface="Calibri"/>
               </a:rPr>
-              <a:t>Create a three-row timetable. Each row stores a subject and room number. Ask for a valid row, then display a sentence containing both selected fields. Also display every subject name using a loop.</a:t>
+              <a:t>Store [</a:t>
+            </a:r>
+            <a:r>
+              <a:rPr sz="2400" b="0">
+                <a:solidFill>
+                  <a:srgbClr val="067D17"/>
+                </a:solidFill>
+                <a:latin typeface="JetBrains Mono"/>
+                <a:ea typeface="JetBrains Mono"/>
+                <a:cs typeface="JetBrains Mono"/>
+              </a:rPr>
+              <a:t>"Maths"</a:t>
+            </a:r>
+            <a:r>
+              <a:rPr sz="2400" b="0">
+                <a:solidFill>
+                  <a:srgbClr val="080808"/>
+                </a:solidFill>
+                <a:latin typeface="Calibri"/>
+                <a:ea typeface="Calibri"/>
+                <a:cs typeface="Calibri"/>
+              </a:rPr>
+              <a:t>, 12], [</a:t>
+            </a:r>
+            <a:r>
+              <a:rPr sz="2400" b="0">
+                <a:solidFill>
+                  <a:srgbClr val="067D17"/>
+                </a:solidFill>
+                <a:latin typeface="JetBrains Mono"/>
+                <a:ea typeface="JetBrains Mono"/>
+                <a:cs typeface="JetBrains Mono"/>
+              </a:rPr>
+              <a:t>"Music"</a:t>
+            </a:r>
+            <a:r>
+              <a:rPr sz="2400" b="0">
+                <a:solidFill>
+                  <a:srgbClr val="080808"/>
+                </a:solidFill>
+                <a:latin typeface="Calibri"/>
+                <a:ea typeface="Calibri"/>
+                <a:cs typeface="Calibri"/>
+              </a:rPr>
+              <a:t>, 4] and [</a:t>
+            </a:r>
+            <a:r>
+              <a:rPr sz="2400" b="0">
+                <a:solidFill>
+                  <a:srgbClr val="067D17"/>
+                </a:solidFill>
+                <a:latin typeface="JetBrains Mono"/>
+                <a:ea typeface="JetBrains Mono"/>
+                <a:cs typeface="JetBrains Mono"/>
+              </a:rPr>
+              <a:t>"Science"</a:t>
+            </a:r>
+            <a:r>
+              <a:rPr sz="2400" b="0">
+                <a:solidFill>
+                  <a:srgbClr val="080808"/>
+                </a:solidFill>
+                <a:latin typeface="Calibri"/>
+                <a:ea typeface="Calibri"/>
+                <a:cs typeface="Calibri"/>
+              </a:rPr>
+              <a:t>, 8] in [timetable]. Ask for a row from 0 to 2 and store it in [row]. Display </a:t>
+            </a:r>
+            <a:r>
+              <a:rPr sz="2400" b="0">
+                <a:solidFill>
+                  <a:srgbClr val="067D17"/>
+                </a:solidFill>
+                <a:latin typeface="JetBrains Mono"/>
+                <a:ea typeface="JetBrains Mono"/>
+                <a:cs typeface="JetBrains Mono"/>
+              </a:rPr>
+              <a:t>"Selected:"</a:t>
+            </a:r>
+            <a:r>
+              <a:rPr sz="2400" b="0">
+                <a:solidFill>
+                  <a:srgbClr val="080808"/>
+                </a:solidFill>
+                <a:latin typeface="Calibri"/>
+                <a:ea typeface="Calibri"/>
+                <a:cs typeface="Calibri"/>
+              </a:rPr>
+              <a:t> followed by the subject, </a:t>
+            </a:r>
+            <a:r>
+              <a:rPr sz="2400" b="0">
+                <a:solidFill>
+                  <a:srgbClr val="067D17"/>
+                </a:solidFill>
+                <a:latin typeface="JetBrains Mono"/>
+                <a:ea typeface="JetBrains Mono"/>
+                <a:cs typeface="JetBrains Mono"/>
+              </a:rPr>
+              <a:t>"in room"</a:t>
+            </a:r>
+            <a:r>
+              <a:rPr sz="2400" b="0">
+                <a:solidFill>
+                  <a:srgbClr val="080808"/>
+                </a:solidFill>
+                <a:latin typeface="Calibri"/>
+                <a:ea typeface="Calibri"/>
+                <a:cs typeface="Calibri"/>
+              </a:rPr>
+              <a:t>, and the room number from that row. Then use a </a:t>
+            </a:r>
+            <a:r>
+              <a:rPr sz="2400" b="0">
+                <a:solidFill>
+                  <a:srgbClr val="1750EB"/>
+                </a:solidFill>
+                <a:latin typeface="JetBrains Mono"/>
+                <a:ea typeface="JetBrains Mono"/>
+                <a:cs typeface="JetBrains Mono"/>
+              </a:rPr>
+              <a:t>for</a:t>
+            </a:r>
+            <a:r>
+              <a:rPr sz="2400" b="0">
+                <a:solidFill>
+                  <a:srgbClr val="080808"/>
+                </a:solidFill>
+                <a:latin typeface="Calibri"/>
+                <a:ea typeface="Calibri"/>
+                <a:cs typeface="Calibri"/>
+              </a:rPr>
+              <a:t> loop to display every subject name beneath </a:t>
+            </a:r>
+            <a:r>
+              <a:rPr sz="2400" b="0">
+                <a:solidFill>
+                  <a:srgbClr val="067D17"/>
+                </a:solidFill>
+                <a:latin typeface="JetBrains Mono"/>
+                <a:ea typeface="JetBrains Mono"/>
+                <a:cs typeface="JetBrains Mono"/>
+              </a:rPr>
+              <a:t>"Subjects:"</a:t>
+            </a:r>
+            <a:r>
+              <a:rPr sz="2400" b="0">
+                <a:solidFill>
+                  <a:srgbClr val="080808"/>
+                </a:solidFill>
+                <a:latin typeface="Calibri"/>
+                <a:ea typeface="Calibri"/>
+                <a:cs typeface="Calibri"/>
+              </a:rPr>
+              <a:t>. Test row 1; display </a:t>
+            </a:r>
+            <a:r>
+              <a:rPr sz="2400" b="0">
+                <a:solidFill>
+                  <a:srgbClr val="067D17"/>
+                </a:solidFill>
+                <a:latin typeface="JetBrains Mono"/>
+                <a:ea typeface="JetBrains Mono"/>
+                <a:cs typeface="JetBrains Mono"/>
+              </a:rPr>
+              <a:t>"Selected: Music in room 4"</a:t>
+            </a:r>
+            <a:r>
+              <a:rPr sz="2400" b="0">
+                <a:solidFill>
+                  <a:srgbClr val="080808"/>
+                </a:solidFill>
+                <a:latin typeface="Calibri"/>
+                <a:ea typeface="Calibri"/>
+                <a:cs typeface="Calibri"/>
+              </a:rPr>
+              <a:t>, followed by Maths, Music and Science on separate lines.</a:t>
             </a:r>
           </a:p>
         </p:txBody>

--- a/Mapped Curriculum Lessons/Grade 8/Lesson 28 - Reading 2D Lists/Reading 2D Lists - Slides.pptx
+++ b/Mapped Curriculum Lessons/Grade 8/Lesson 28 - Reading 2D Lists/Reading 2D Lists - Slides.pptx
@@ -2,28 +2,28 @@
 <file path=ppt/presentation.xml><?xml version="1.0" encoding="utf-8"?>
 <p:presentation xmlns:p="http://schemas.openxmlformats.org/presentationml/2006/main" embedTrueTypeFonts="1" saveSubsetFonts="0">
   <p:sldMasterIdLst>
-    <p:sldMasterId xmlns:r="http://schemas.openxmlformats.org/officeDocument/2006/relationships" id="2147483648" r:id="R871ae38a6df447f4"/>
+    <p:sldMasterId xmlns:r="http://schemas.openxmlformats.org/officeDocument/2006/relationships" id="2147483648" r:id="R94664f19d39740cf"/>
   </p:sldMasterIdLst>
   <p:notesMasterIdLst>
-    <p:notesMasterId xmlns:r="http://schemas.openxmlformats.org/officeDocument/2006/relationships" r:id="R2f2db57f27984030"/>
+    <p:notesMasterId xmlns:r="http://schemas.openxmlformats.org/officeDocument/2006/relationships" r:id="R825ca28a2ce344e2"/>
   </p:notesMasterIdLst>
   <p:sldIdLst>
-    <p:sldId xmlns:r="http://schemas.openxmlformats.org/officeDocument/2006/relationships" id="256" r:id="R2ab3ca78033b4c3a"/>
-    <p:sldId xmlns:r="http://schemas.openxmlformats.org/officeDocument/2006/relationships" id="257" r:id="Rd09f29db3ada473f"/>
-    <p:sldId xmlns:r="http://schemas.openxmlformats.org/officeDocument/2006/relationships" id="258" r:id="R4a7c9f49ef1f429e"/>
-    <p:sldId xmlns:r="http://schemas.openxmlformats.org/officeDocument/2006/relationships" id="259" r:id="R64ad382d401d48fd"/>
-    <p:sldId xmlns:r="http://schemas.openxmlformats.org/officeDocument/2006/relationships" id="260" r:id="R49cb517d719c44ca"/>
-    <p:sldId xmlns:r="http://schemas.openxmlformats.org/officeDocument/2006/relationships" id="261" r:id="R35ed22180e68429c"/>
-    <p:sldId xmlns:r="http://schemas.openxmlformats.org/officeDocument/2006/relationships" id="262" r:id="R3b5bf6b9c9f14c19"/>
-    <p:sldId xmlns:r="http://schemas.openxmlformats.org/officeDocument/2006/relationships" id="263" r:id="R570fc673b4ee4446"/>
-    <p:sldId xmlns:r="http://schemas.openxmlformats.org/officeDocument/2006/relationships" id="264" r:id="R12a687ab001240af"/>
+    <p:sldId xmlns:r="http://schemas.openxmlformats.org/officeDocument/2006/relationships" id="256" r:id="R5b43aa2d8b8b4bd3"/>
+    <p:sldId xmlns:r="http://schemas.openxmlformats.org/officeDocument/2006/relationships" id="257" r:id="Rb6547853ca5c4253"/>
+    <p:sldId xmlns:r="http://schemas.openxmlformats.org/officeDocument/2006/relationships" id="258" r:id="R1f6c0dccdd0a4e33"/>
+    <p:sldId xmlns:r="http://schemas.openxmlformats.org/officeDocument/2006/relationships" id="259" r:id="R508a639c36104acf"/>
+    <p:sldId xmlns:r="http://schemas.openxmlformats.org/officeDocument/2006/relationships" id="260" r:id="Rb3519f6754d54170"/>
+    <p:sldId xmlns:r="http://schemas.openxmlformats.org/officeDocument/2006/relationships" id="261" r:id="R46a1df6843274a12"/>
+    <p:sldId xmlns:r="http://schemas.openxmlformats.org/officeDocument/2006/relationships" id="262" r:id="Rbb0bc73f2b8740db"/>
+    <p:sldId xmlns:r="http://schemas.openxmlformats.org/officeDocument/2006/relationships" id="263" r:id="Re0a522d9f194477f"/>
+    <p:sldId xmlns:r="http://schemas.openxmlformats.org/officeDocument/2006/relationships" id="264" r:id="Rff7b57df2d044218"/>
   </p:sldIdLst>
   <p:sldSz cx="12192000" cy="6858000"/>
   <p:notesSz cx="6858000" cy="9144000"/>
   <p:embeddedFontLst>
     <p:embeddedFont>
       <p:font typeface="JetBrains Mono"/>
-      <p:regular xmlns:r="http://schemas.openxmlformats.org/officeDocument/2006/relationships" r:id="R40591800a5994540"/>
+      <p:regular xmlns:r="http://schemas.openxmlformats.org/officeDocument/2006/relationships" r:id="Ra3e2c76a3fd44b4d"/>
     </p:embeddedFont>
   </p:embeddedFontLst>
 </p:presentation>
@@ -1071,7 +1071,7 @@
           <p:nvPr/>
         </p:nvPicPr>
         <p:blipFill rotWithShape="1">
-          <a:blip xmlns:r="http://schemas.openxmlformats.org/officeDocument/2006/relationships" xmlns:a="http://schemas.openxmlformats.org/drawingml/2006/main" r:embed="Rda029ea8b90649dc"/>
+          <a:blip xmlns:r="http://schemas.openxmlformats.org/officeDocument/2006/relationships" xmlns:a="http://schemas.openxmlformats.org/drawingml/2006/main" r:embed="R16d7565a1ca74f74"/>
           <a:stretch xmlns:a="http://schemas.openxmlformats.org/drawingml/2006/main"/>
         </p:blipFill>
         <p:spPr>
@@ -1451,7 +1451,7 @@
           <p:nvPr/>
         </p:nvPicPr>
         <p:blipFill rotWithShape="1">
-          <a:blip xmlns:r="http://schemas.openxmlformats.org/officeDocument/2006/relationships" xmlns:a="http://schemas.openxmlformats.org/drawingml/2006/main" r:embed="Re06170297c8e4706">
+          <a:blip xmlns:r="http://schemas.openxmlformats.org/officeDocument/2006/relationships" xmlns:a="http://schemas.openxmlformats.org/drawingml/2006/main" r:embed="Ra9f4b22d537f4fb2">
             <a:alphaModFix amt="28000"/>
           </a:blip>
           <a:stretch xmlns:a="http://schemas.openxmlformats.org/drawingml/2006/main"/>
@@ -1664,7 +1664,7 @@
           <p:nvPr/>
         </p:nvPicPr>
         <p:blipFill rotWithShape="1">
-          <a:blip xmlns:r="http://schemas.openxmlformats.org/officeDocument/2006/relationships" xmlns:a="http://schemas.openxmlformats.org/drawingml/2006/main" r:embed="R6e94438d69c8471e">
+          <a:blip xmlns:r="http://schemas.openxmlformats.org/officeDocument/2006/relationships" xmlns:a="http://schemas.openxmlformats.org/drawingml/2006/main" r:embed="Ref6f58384f5b475d">
             <a:alphaModFix amt="28000"/>
           </a:blip>
           <a:stretch xmlns:a="http://schemas.openxmlformats.org/drawingml/2006/main"/>
@@ -1899,7 +1899,7 @@
           <p:nvPr/>
         </p:nvPicPr>
         <p:blipFill rotWithShape="1">
-          <a:blip xmlns:r="http://schemas.openxmlformats.org/officeDocument/2006/relationships" xmlns:a="http://schemas.openxmlformats.org/drawingml/2006/main" r:embed="Rb33bb4a8edbc4763">
+          <a:blip xmlns:r="http://schemas.openxmlformats.org/officeDocument/2006/relationships" xmlns:a="http://schemas.openxmlformats.org/drawingml/2006/main" r:embed="Rb6db4b2699d9466f">
             <a:alphaModFix amt="28000"/>
           </a:blip>
           <a:stretch xmlns:a="http://schemas.openxmlformats.org/drawingml/2006/main"/>
@@ -2176,7 +2176,7 @@
           <p:nvPr/>
         </p:nvPicPr>
         <p:blipFill rotWithShape="1">
-          <a:blip xmlns:r="http://schemas.openxmlformats.org/officeDocument/2006/relationships" xmlns:a="http://schemas.openxmlformats.org/drawingml/2006/main" r:embed="R21020845d4cb42a8">
+          <a:blip xmlns:r="http://schemas.openxmlformats.org/officeDocument/2006/relationships" xmlns:a="http://schemas.openxmlformats.org/drawingml/2006/main" r:embed="R8bd450488787437a">
             <a:alphaModFix amt="28000"/>
           </a:blip>
           <a:stretch xmlns:a="http://schemas.openxmlformats.org/drawingml/2006/main"/>
@@ -2451,7 +2451,7 @@
           <p:nvPr/>
         </p:nvPicPr>
         <p:blipFill rotWithShape="1">
-          <a:blip xmlns:r="http://schemas.openxmlformats.org/officeDocument/2006/relationships" xmlns:a="http://schemas.openxmlformats.org/drawingml/2006/main" r:embed="R0e7d4e7ae00d4d64">
+          <a:blip xmlns:r="http://schemas.openxmlformats.org/officeDocument/2006/relationships" xmlns:a="http://schemas.openxmlformats.org/drawingml/2006/main" r:embed="Re5a85321a9c04e7d">
             <a:alphaModFix amt="28000"/>
           </a:blip>
           <a:stretch xmlns:a="http://schemas.openxmlformats.org/drawingml/2006/main"/>
@@ -2875,7 +2875,7 @@
           <p:nvPr/>
         </p:nvPicPr>
         <p:blipFill rotWithShape="1">
-          <a:blip xmlns:r="http://schemas.openxmlformats.org/officeDocument/2006/relationships" xmlns:a="http://schemas.openxmlformats.org/drawingml/2006/main" r:embed="R0e6ed1f13b7f493d">
+          <a:blip xmlns:r="http://schemas.openxmlformats.org/officeDocument/2006/relationships" xmlns:a="http://schemas.openxmlformats.org/drawingml/2006/main" r:embed="Ra68a2feff739471c">
             <a:alphaModFix amt="28000"/>
           </a:blip>
           <a:stretch xmlns:a="http://schemas.openxmlformats.org/drawingml/2006/main"/>
@@ -3016,7 +3016,7 @@
           <p:nvPr/>
         </p:nvPicPr>
         <p:blipFill rotWithShape="1">
-          <a:blip xmlns:r="http://schemas.openxmlformats.org/officeDocument/2006/relationships" xmlns:a="http://schemas.openxmlformats.org/drawingml/2006/main" r:embed="R8b12489b7e62401b">
+          <a:blip xmlns:r="http://schemas.openxmlformats.org/officeDocument/2006/relationships" xmlns:a="http://schemas.openxmlformats.org/drawingml/2006/main" r:embed="R83dba1086fdf4227">
             <a:alphaModFix amt="28000"/>
           </a:blip>
           <a:stretch xmlns:a="http://schemas.openxmlformats.org/drawingml/2006/main"/>
@@ -3130,7 +3130,7 @@
           <p:nvPr/>
         </p:nvPicPr>
         <p:blipFill rotWithShape="1">
-          <a:blip xmlns:r="http://schemas.openxmlformats.org/officeDocument/2006/relationships" xmlns:a="http://schemas.openxmlformats.org/drawingml/2006/main" r:embed="Rc319e24d17394ffa">
+          <a:blip xmlns:r="http://schemas.openxmlformats.org/officeDocument/2006/relationships" xmlns:a="http://schemas.openxmlformats.org/drawingml/2006/main" r:embed="Rf749a7d23d004c53">
             <a:alphaModFix amt="28000"/>
           </a:blip>
           <a:stretch xmlns:a="http://schemas.openxmlformats.org/drawingml/2006/main"/>
@@ -3457,7 +3457,7 @@
           <p:nvPr/>
         </p:nvPicPr>
         <p:blipFill rotWithShape="1">
-          <a:blip xmlns:r="http://schemas.openxmlformats.org/officeDocument/2006/relationships" xmlns:a="http://schemas.openxmlformats.org/drawingml/2006/main" r:embed="R212cbf78584240ac">
+          <a:blip xmlns:r="http://schemas.openxmlformats.org/officeDocument/2006/relationships" xmlns:a="http://schemas.openxmlformats.org/drawingml/2006/main" r:embed="R244d03e349244319">
             <a:alphaModFix amt="28000"/>
           </a:blip>
           <a:stretch xmlns:a="http://schemas.openxmlformats.org/drawingml/2006/main"/>
@@ -3745,7 +3745,7 @@
           <p:nvPr/>
         </p:nvPicPr>
         <p:blipFill rotWithShape="1">
-          <a:blip xmlns:r="http://schemas.openxmlformats.org/officeDocument/2006/relationships" xmlns:a="http://schemas.openxmlformats.org/drawingml/2006/main" r:embed="R63d97b639ee347c0">
+          <a:blip xmlns:r="http://schemas.openxmlformats.org/officeDocument/2006/relationships" xmlns:a="http://schemas.openxmlformats.org/drawingml/2006/main" r:embed="Rc904dfd410e34775">
             <a:alphaModFix amt="28000"/>
           </a:blip>
           <a:stretch xmlns:a="http://schemas.openxmlformats.org/drawingml/2006/main"/>
@@ -3982,17 +3982,17 @@
   </p:cSld>
   <p:clrMap bg1="lt1" tx1="dk1" bg2="lt2" tx2="dk2" accent1="accent1" accent2="accent2" accent3="accent3" accent4="accent4" accent5="accent5" accent6="accent6" hlink="hlink" folHlink="folHlink"/>
   <p:sldLayoutIdLst>
-    <p:sldLayoutId xmlns:r="http://schemas.openxmlformats.org/officeDocument/2006/relationships" id="2147483649" r:id="R4ff4a728008f4916"/>
-    <p:sldLayoutId xmlns:r="http://schemas.openxmlformats.org/officeDocument/2006/relationships" id="2147483650" r:id="Rc8ef249ed6e6416c"/>
-    <p:sldLayoutId xmlns:r="http://schemas.openxmlformats.org/officeDocument/2006/relationships" id="2147483651" r:id="R2cc6c2924ff14991"/>
-    <p:sldLayoutId xmlns:r="http://schemas.openxmlformats.org/officeDocument/2006/relationships" id="2147483652" r:id="R6e09269cd3e9419d"/>
-    <p:sldLayoutId xmlns:r="http://schemas.openxmlformats.org/officeDocument/2006/relationships" id="2147483653" r:id="Ra5fa3c9a4287446c"/>
-    <p:sldLayoutId xmlns:r="http://schemas.openxmlformats.org/officeDocument/2006/relationships" id="2147483654" r:id="Rc9a6d0983eae41f5"/>
-    <p:sldLayoutId xmlns:r="http://schemas.openxmlformats.org/officeDocument/2006/relationships" id="2147483655" r:id="R89d17f6490094342"/>
-    <p:sldLayoutId xmlns:r="http://schemas.openxmlformats.org/officeDocument/2006/relationships" id="2147483656" r:id="Ra0cec4891bc14c16"/>
-    <p:sldLayoutId xmlns:r="http://schemas.openxmlformats.org/officeDocument/2006/relationships" id="2147483657" r:id="R25cdb7474bea4789"/>
-    <p:sldLayoutId xmlns:r="http://schemas.openxmlformats.org/officeDocument/2006/relationships" id="2147483658" r:id="R723dfb598bcf4818"/>
-    <p:sldLayoutId xmlns:r="http://schemas.openxmlformats.org/officeDocument/2006/relationships" id="2147483659" r:id="Rab77bc0621324511"/>
+    <p:sldLayoutId xmlns:r="http://schemas.openxmlformats.org/officeDocument/2006/relationships" id="2147483649" r:id="R00928b18e4f5431a"/>
+    <p:sldLayoutId xmlns:r="http://schemas.openxmlformats.org/officeDocument/2006/relationships" id="2147483650" r:id="Rfd38fb1a6aaa4759"/>
+    <p:sldLayoutId xmlns:r="http://schemas.openxmlformats.org/officeDocument/2006/relationships" id="2147483651" r:id="R53c0c5e908fb45d0"/>
+    <p:sldLayoutId xmlns:r="http://schemas.openxmlformats.org/officeDocument/2006/relationships" id="2147483652" r:id="Rf049e6b78e3a4deb"/>
+    <p:sldLayoutId xmlns:r="http://schemas.openxmlformats.org/officeDocument/2006/relationships" id="2147483653" r:id="Re7bac8cf568748d3"/>
+    <p:sldLayoutId xmlns:r="http://schemas.openxmlformats.org/officeDocument/2006/relationships" id="2147483654" r:id="R7718af293fa540e0"/>
+    <p:sldLayoutId xmlns:r="http://schemas.openxmlformats.org/officeDocument/2006/relationships" id="2147483655" r:id="Rc0c81028f0824550"/>
+    <p:sldLayoutId xmlns:r="http://schemas.openxmlformats.org/officeDocument/2006/relationships" id="2147483656" r:id="R086e513bffc944b6"/>
+    <p:sldLayoutId xmlns:r="http://schemas.openxmlformats.org/officeDocument/2006/relationships" id="2147483657" r:id="Rbe7f625f47814385"/>
+    <p:sldLayoutId xmlns:r="http://schemas.openxmlformats.org/officeDocument/2006/relationships" id="2147483658" r:id="R7de9d4e394c94e79"/>
+    <p:sldLayoutId xmlns:r="http://schemas.openxmlformats.org/officeDocument/2006/relationships" id="2147483659" r:id="Rab16d0c9cb854beb"/>
   </p:sldLayoutIdLst>
   <p:hf hdr="0" ftr="0" dt="0"/>
   <p:txStyles>
@@ -7383,10 +7383,82 @@
                 <a:ea typeface="Calibri"/>
                 <a:cs typeface="Calibri"/>
               </a:rPr>
-              <a:t>Ask for a column from 0 to 1 as well as the row. Display the value in [clubs] at [row] and [column]. Test row 2 and column 0; the program should display </a:t>
+              <a:t>Change the example so it also asks for a column: 0 for the club name or 1 for the member count. Display the value at </a:t>
+            </a:r>
+            <a:r>
+              <a:rPr sz="2050" b="0">
+                <a:solidFill>
+                  <a:srgbClr val="6A1B9A"/>
+                </a:solidFill>
+                <a:highlight>
+                  <a:srgbClr val="ECEAF4"/>
+                </a:highlight>
+                <a:latin typeface="JetBrains Mono"/>
+                <a:ea typeface="JetBrains Mono"/>
+                <a:cs typeface="JetBrains Mono"/>
+              </a:rPr>
+              <a:t> row </a:t>
             </a:r>
             <a:r>
               <a:rPr sz="2400" b="0">
+                <a:solidFill>
+                  <a:srgbClr val="080808"/>
+                </a:solidFill>
+                <a:latin typeface="Calibri"/>
+                <a:ea typeface="Calibri"/>
+                <a:cs typeface="Calibri"/>
+              </a:rPr>
+              <a:t> and </a:t>
+            </a:r>
+            <a:r>
+              <a:rPr sz="2050" b="0">
+                <a:solidFill>
+                  <a:srgbClr val="6A1B9A"/>
+                </a:solidFill>
+                <a:highlight>
+                  <a:srgbClr val="ECEAF4"/>
+                </a:highlight>
+                <a:latin typeface="JetBrains Mono"/>
+                <a:ea typeface="JetBrains Mono"/>
+                <a:cs typeface="JetBrains Mono"/>
+              </a:rPr>
+              <a:t> column </a:t>
+            </a:r>
+            <a:r>
+              <a:rPr sz="2400" b="0">
+                <a:solidFill>
+                  <a:srgbClr val="080808"/>
+                </a:solidFill>
+                <a:latin typeface="Calibri"/>
+                <a:ea typeface="Calibri"/>
+                <a:cs typeface="Calibri"/>
+              </a:rPr>
+              <a:t> after </a:t>
+            </a:r>
+            <a:r>
+              <a:rPr sz="2050" b="0">
+                <a:solidFill>
+                  <a:srgbClr val="067D17"/>
+                </a:solidFill>
+                <a:latin typeface="JetBrains Mono"/>
+                <a:ea typeface="JetBrains Mono"/>
+                <a:cs typeface="JetBrains Mono"/>
+              </a:rPr>
+              <a:t>"Selected field:"</a:t>
+            </a:r>
+            <a:r>
+              <a:rPr sz="2400" b="0">
+                <a:solidFill>
+                  <a:srgbClr val="080808"/>
+                </a:solidFill>
+                <a:latin typeface="Calibri"/>
+                <a:ea typeface="Calibri"/>
+                <a:cs typeface="Calibri"/>
+              </a:rPr>
+              <a:t> before the other outputs. For example, row 2 and column 0 display </a:t>
+            </a:r>
+            <a:r>
+              <a:rPr sz="2050" b="0">
                 <a:solidFill>
                   <a:srgbClr val="067D17"/>
                 </a:solidFill>
@@ -8087,7 +8159,7 @@
         </p:spPr>
         <p:txBody>
           <a:bodyPr xmlns:a="http://schemas.openxmlformats.org/drawingml/2006/main">
-            <a:normAutofit fontScale="99952"/>
+            <a:normAutofit fontScale="100000"/>
           </a:bodyPr>
           <a:lstStyle xmlns:a="http://schemas.openxmlformats.org/drawingml/2006/main"/>
           <a:p xmlns:a="http://schemas.openxmlformats.org/drawingml/2006/main">
@@ -8106,10 +8178,10 @@
                 <a:ea typeface="Calibri"/>
                 <a:cs typeface="Calibri"/>
               </a:rPr>
-              <a:t>Use a </a:t>
-            </a:r>
-            <a:r>
-              <a:rPr sz="2400" b="0">
+              <a:t>Change the example so it displays every row instead of asking for one. Use a </a:t>
+            </a:r>
+            <a:r>
+              <a:rPr sz="2050" b="0">
                 <a:solidFill>
                   <a:srgbClr val="1750EB"/>
                 </a:solidFill>
@@ -8128,18 +8200,21 @@
                 <a:ea typeface="Calibri"/>
                 <a:cs typeface="Calibri"/>
               </a:rPr>
-              <a:t> loop to visit each row in [clubs]. For each [club], display </a:t>
-            </a:r>
-            <a:r>
-              <a:rPr sz="2400" b="0">
-                <a:solidFill>
-                  <a:srgbClr val="067D17"/>
-                </a:solidFill>
-                <a:latin typeface="JetBrains Mono"/>
-                <a:ea typeface="JetBrains Mono"/>
-                <a:cs typeface="JetBrains Mono"/>
-              </a:rPr>
-              <a:t>"Club:"</a:t>
+              <a:t> loop with </a:t>
+            </a:r>
+            <a:r>
+              <a:rPr sz="2050" b="0">
+                <a:solidFill>
+                  <a:srgbClr val="6A1B9A"/>
+                </a:solidFill>
+                <a:highlight>
+                  <a:srgbClr val="ECEAF4"/>
+                </a:highlight>
+                <a:latin typeface="JetBrains Mono"/>
+                <a:ea typeface="JetBrains Mono"/>
+                <a:cs typeface="JetBrains Mono"/>
+              </a:rPr>
+              <a:t> club </a:t>
             </a:r>
             <a:r>
               <a:rPr sz="2400" b="0">
@@ -8150,10 +8225,10 @@
                 <a:ea typeface="Calibri"/>
                 <a:cs typeface="Calibri"/>
               </a:rPr>
-              <a:t> followed by the value at position 0, then display </a:t>
-            </a:r>
-            <a:r>
-              <a:rPr sz="2400" b="0">
+              <a:t> to display </a:t>
+            </a:r>
+            <a:r>
+              <a:rPr sz="2050" b="0">
                 <a:solidFill>
                   <a:srgbClr val="067D17"/>
                 </a:solidFill>
@@ -8161,7 +8236,7 @@
                 <a:ea typeface="JetBrains Mono"/>
                 <a:cs typeface="JetBrains Mono"/>
               </a:rPr>
-              <a:t>"Members:"</a:t>
+              <a:t>"Club:"</a:t>
             </a:r>
             <a:r>
               <a:rPr sz="2400" b="0">
@@ -8172,18 +8247,18 @@
                 <a:ea typeface="Calibri"/>
                 <a:cs typeface="Calibri"/>
               </a:rPr>
-              <a:t> followed by the value at position 1. The starter data must display Art with 12 members, Chess with 18 members and Code with 15 members without displaying </a:t>
-            </a:r>
-            <a:r>
-              <a:rPr sz="2400" b="0">
-                <a:solidFill>
-                  <a:srgbClr val="1750EB"/>
-                </a:solidFill>
-                <a:latin typeface="JetBrains Mono"/>
-                <a:ea typeface="JetBrains Mono"/>
-                <a:cs typeface="JetBrains Mono"/>
-              </a:rPr>
-              <a:t>list</a:t>
+              <a:t> with the name and </a:t>
+            </a:r>
+            <a:r>
+              <a:rPr sz="2050" b="0">
+                <a:solidFill>
+                  <a:srgbClr val="067D17"/>
+                </a:solidFill>
+                <a:latin typeface="JetBrains Mono"/>
+                <a:ea typeface="JetBrains Mono"/>
+                <a:cs typeface="JetBrains Mono"/>
+              </a:rPr>
+              <a:t>"Members:"</a:t>
             </a:r>
             <a:r>
               <a:rPr sz="2400" b="0">
@@ -8194,7 +8269,51 @@
                 <a:ea typeface="Calibri"/>
                 <a:cs typeface="Calibri"/>
               </a:rPr>
-              <a:t> brackets.</a:t>
+              <a:t> with the count on the next line. The first pair should be </a:t>
+            </a:r>
+            <a:r>
+              <a:rPr sz="2050" b="0">
+                <a:solidFill>
+                  <a:srgbClr val="067D17"/>
+                </a:solidFill>
+                <a:latin typeface="JetBrains Mono"/>
+                <a:ea typeface="JetBrains Mono"/>
+                <a:cs typeface="JetBrains Mono"/>
+              </a:rPr>
+              <a:t>"Club: Art"</a:t>
+            </a:r>
+            <a:r>
+              <a:rPr sz="2400" b="0">
+                <a:solidFill>
+                  <a:srgbClr val="080808"/>
+                </a:solidFill>
+                <a:latin typeface="Calibri"/>
+                <a:ea typeface="Calibri"/>
+                <a:cs typeface="Calibri"/>
+              </a:rPr>
+              <a:t> and </a:t>
+            </a:r>
+            <a:r>
+              <a:rPr sz="2050" b="0">
+                <a:solidFill>
+                  <a:srgbClr val="067D17"/>
+                </a:solidFill>
+                <a:latin typeface="JetBrains Mono"/>
+                <a:ea typeface="JetBrains Mono"/>
+                <a:cs typeface="JetBrains Mono"/>
+              </a:rPr>
+              <a:t>"Members: 12"</a:t>
+            </a:r>
+            <a:r>
+              <a:rPr sz="2400" b="0">
+                <a:solidFill>
+                  <a:srgbClr val="080808"/>
+                </a:solidFill>
+                <a:latin typeface="Calibri"/>
+                <a:ea typeface="Calibri"/>
+                <a:cs typeface="Calibri"/>
+              </a:rPr>
+              <a:t>.</a:t>
             </a:r>
           </a:p>
         </p:txBody>
@@ -8876,7 +8995,7 @@
         </p:spPr>
         <p:txBody>
           <a:bodyPr xmlns:a="http://schemas.openxmlformats.org/drawingml/2006/main">
-            <a:normAutofit fontScale="87835"/>
+            <a:normAutofit fontScale="100000"/>
           </a:bodyPr>
           <a:lstStyle xmlns:a="http://schemas.openxmlformats.org/drawingml/2006/main"/>
           <a:p xmlns:a="http://schemas.openxmlformats.org/drawingml/2006/main">
@@ -8895,18 +9014,18 @@
                 <a:ea typeface="Calibri"/>
                 <a:cs typeface="Calibri"/>
               </a:rPr>
-              <a:t>Store [</a:t>
-            </a:r>
-            <a:r>
-              <a:rPr sz="2400" b="0">
-                <a:solidFill>
-                  <a:srgbClr val="067D17"/>
-                </a:solidFill>
-                <a:latin typeface="JetBrains Mono"/>
-                <a:ea typeface="JetBrains Mono"/>
-                <a:cs typeface="JetBrains Mono"/>
-              </a:rPr>
-              <a:t>"Maths"</a:t>
+              <a:t>Create a 2D </a:t>
+            </a:r>
+            <a:r>
+              <a:rPr sz="2050" b="0">
+                <a:solidFill>
+                  <a:srgbClr val="1750EB"/>
+                </a:solidFill>
+                <a:latin typeface="JetBrains Mono"/>
+                <a:ea typeface="JetBrains Mono"/>
+                <a:cs typeface="JetBrains Mono"/>
+              </a:rPr>
+              <a:t>list</a:t>
             </a:r>
             <a:r>
               <a:rPr sz="2400" b="0">
@@ -8917,18 +9036,21 @@
                 <a:ea typeface="Calibri"/>
                 <a:cs typeface="Calibri"/>
               </a:rPr>
-              <a:t>, 12], [</a:t>
-            </a:r>
-            <a:r>
-              <a:rPr sz="2400" b="0">
-                <a:solidFill>
-                  <a:srgbClr val="067D17"/>
-                </a:solidFill>
-                <a:latin typeface="JetBrains Mono"/>
-                <a:ea typeface="JetBrains Mono"/>
-                <a:cs typeface="JetBrains Mono"/>
-              </a:rPr>
-              <a:t>"Music"</a:t>
+              <a:t> called </a:t>
+            </a:r>
+            <a:r>
+              <a:rPr sz="2050" b="0">
+                <a:solidFill>
+                  <a:srgbClr val="6A1B9A"/>
+                </a:solidFill>
+                <a:highlight>
+                  <a:srgbClr val="ECEAF4"/>
+                </a:highlight>
+                <a:latin typeface="JetBrains Mono"/>
+                <a:ea typeface="JetBrains Mono"/>
+                <a:cs typeface="JetBrains Mono"/>
+              </a:rPr>
+              <a:t> timetable </a:t>
             </a:r>
             <a:r>
               <a:rPr sz="2400" b="0">
@@ -8939,10 +9061,10 @@
                 <a:ea typeface="Calibri"/>
                 <a:cs typeface="Calibri"/>
               </a:rPr>
-              <a:t>, 4] and [</a:t>
-            </a:r>
-            <a:r>
-              <a:rPr sz="2400" b="0">
+              <a:t> with rows [</a:t>
+            </a:r>
+            <a:r>
+              <a:rPr sz="2050" b="0">
                 <a:solidFill>
                   <a:srgbClr val="067D17"/>
                 </a:solidFill>
@@ -8950,7 +9072,7 @@
                 <a:ea typeface="JetBrains Mono"/>
                 <a:cs typeface="JetBrains Mono"/>
               </a:rPr>
-              <a:t>"Science"</a:t>
+              <a:t>"Maths"</a:t>
             </a:r>
             <a:r>
               <a:rPr sz="2400" b="0">
@@ -8961,10 +9083,10 @@
                 <a:ea typeface="Calibri"/>
                 <a:cs typeface="Calibri"/>
               </a:rPr>
-              <a:t>, 8] in [timetable]. Ask for a row from 0 to 2 and store it in [row]. Display </a:t>
-            </a:r>
-            <a:r>
-              <a:rPr sz="2400" b="0">
+              <a:t>, 12], [</a:t>
+            </a:r>
+            <a:r>
+              <a:rPr sz="2050" b="0">
                 <a:solidFill>
                   <a:srgbClr val="067D17"/>
                 </a:solidFill>
@@ -8972,7 +9094,7 @@
                 <a:ea typeface="JetBrains Mono"/>
                 <a:cs typeface="JetBrains Mono"/>
               </a:rPr>
-              <a:t>"Selected:"</a:t>
+              <a:t>"Music"</a:t>
             </a:r>
             <a:r>
               <a:rPr sz="2400" b="0">
@@ -8983,10 +9105,10 @@
                 <a:ea typeface="Calibri"/>
                 <a:cs typeface="Calibri"/>
               </a:rPr>
-              <a:t> followed by the subject, </a:t>
-            </a:r>
-            <a:r>
-              <a:rPr sz="2400" b="0">
+              <a:t>, 4] and [</a:t>
+            </a:r>
+            <a:r>
+              <a:rPr sz="2050" b="0">
                 <a:solidFill>
                   <a:srgbClr val="067D17"/>
                 </a:solidFill>
@@ -8994,7 +9116,7 @@
                 <a:ea typeface="JetBrains Mono"/>
                 <a:cs typeface="JetBrains Mono"/>
               </a:rPr>
-              <a:t>"in room"</a:t>
+              <a:t>"Science"</a:t>
             </a:r>
             <a:r>
               <a:rPr sz="2400" b="0">
@@ -9005,18 +9127,18 @@
                 <a:ea typeface="Calibri"/>
                 <a:cs typeface="Calibri"/>
               </a:rPr>
-              <a:t>, and the room number from that row. Then use a </a:t>
-            </a:r>
-            <a:r>
-              <a:rPr sz="2400" b="0">
-                <a:solidFill>
-                  <a:srgbClr val="1750EB"/>
-                </a:solidFill>
-                <a:latin typeface="JetBrains Mono"/>
-                <a:ea typeface="JetBrains Mono"/>
-                <a:cs typeface="JetBrains Mono"/>
-              </a:rPr>
-              <a:t>for</a:t>
+              <a:t>, 8]. Ask for a row from 0 to 2 and display the subject and room, such as </a:t>
+            </a:r>
+            <a:r>
+              <a:rPr sz="2050" b="0">
+                <a:solidFill>
+                  <a:srgbClr val="067D17"/>
+                </a:solidFill>
+                <a:latin typeface="JetBrains Mono"/>
+                <a:ea typeface="JetBrains Mono"/>
+                <a:cs typeface="JetBrains Mono"/>
+              </a:rPr>
+              <a:t>"Selected: Music in room 4"</a:t>
             </a:r>
             <a:r>
               <a:rPr sz="2400" b="0">
@@ -9027,18 +9149,18 @@
                 <a:ea typeface="Calibri"/>
                 <a:cs typeface="Calibri"/>
               </a:rPr>
-              <a:t> loop to display every subject name beneath </a:t>
-            </a:r>
-            <a:r>
-              <a:rPr sz="2400" b="0">
-                <a:solidFill>
-                  <a:srgbClr val="067D17"/>
-                </a:solidFill>
-                <a:latin typeface="JetBrains Mono"/>
-                <a:ea typeface="JetBrains Mono"/>
-                <a:cs typeface="JetBrains Mono"/>
-              </a:rPr>
-              <a:t>"Subjects:"</a:t>
+              <a:t>. Then use a </a:t>
+            </a:r>
+            <a:r>
+              <a:rPr sz="2050" b="0">
+                <a:solidFill>
+                  <a:srgbClr val="1750EB"/>
+                </a:solidFill>
+                <a:latin typeface="JetBrains Mono"/>
+                <a:ea typeface="JetBrains Mono"/>
+                <a:cs typeface="JetBrains Mono"/>
+              </a:rPr>
+              <a:t>for</a:t>
             </a:r>
             <a:r>
               <a:rPr sz="2400" b="0">
@@ -9049,10 +9171,10 @@
                 <a:ea typeface="Calibri"/>
                 <a:cs typeface="Calibri"/>
               </a:rPr>
-              <a:t>. Test row 1; display </a:t>
-            </a:r>
-            <a:r>
-              <a:rPr sz="2400" b="0">
+              <a:t> loop to display every subject after </a:t>
+            </a:r>
+            <a:r>
+              <a:rPr sz="2050" b="0">
                 <a:solidFill>
                   <a:srgbClr val="067D17"/>
                 </a:solidFill>
@@ -9060,7 +9182,7 @@
                 <a:ea typeface="JetBrains Mono"/>
                 <a:cs typeface="JetBrains Mono"/>
               </a:rPr>
-              <a:t>"Selected: Music in room 4"</a:t>
+              <a:t>"Subjects:"</a:t>
             </a:r>
             <a:r>
               <a:rPr sz="2400" b="0">
@@ -9071,7 +9193,7 @@
                 <a:ea typeface="Calibri"/>
                 <a:cs typeface="Calibri"/>
               </a:rPr>
-              <a:t>, followed by Maths, Music and Science on separate lines.</a:t>
+              <a:t>.</a:t>
             </a:r>
           </a:p>
         </p:txBody>

--- a/Mapped Curriculum Lessons/Grade 8/Lesson 28 - Reading 2D Lists/Reading 2D Lists - Slides.pptx
+++ b/Mapped Curriculum Lessons/Grade 8/Lesson 28 - Reading 2D Lists/Reading 2D Lists - Slides.pptx
@@ -2,28 +2,28 @@
 <file path=ppt/presentation.xml><?xml version="1.0" encoding="utf-8"?>
 <p:presentation xmlns:p="http://schemas.openxmlformats.org/presentationml/2006/main" embedTrueTypeFonts="1" saveSubsetFonts="0">
   <p:sldMasterIdLst>
-    <p:sldMasterId xmlns:r="http://schemas.openxmlformats.org/officeDocument/2006/relationships" id="2147483648" r:id="R94664f19d39740cf"/>
+    <p:sldMasterId xmlns:r="http://schemas.openxmlformats.org/officeDocument/2006/relationships" id="2147483648" r:id="R0c78d4ada97f431f"/>
   </p:sldMasterIdLst>
   <p:notesMasterIdLst>
-    <p:notesMasterId xmlns:r="http://schemas.openxmlformats.org/officeDocument/2006/relationships" r:id="R825ca28a2ce344e2"/>
+    <p:notesMasterId xmlns:r="http://schemas.openxmlformats.org/officeDocument/2006/relationships" r:id="R3335c189b7e14fb0"/>
   </p:notesMasterIdLst>
   <p:sldIdLst>
-    <p:sldId xmlns:r="http://schemas.openxmlformats.org/officeDocument/2006/relationships" id="256" r:id="R5b43aa2d8b8b4bd3"/>
-    <p:sldId xmlns:r="http://schemas.openxmlformats.org/officeDocument/2006/relationships" id="257" r:id="Rb6547853ca5c4253"/>
-    <p:sldId xmlns:r="http://schemas.openxmlformats.org/officeDocument/2006/relationships" id="258" r:id="R1f6c0dccdd0a4e33"/>
-    <p:sldId xmlns:r="http://schemas.openxmlformats.org/officeDocument/2006/relationships" id="259" r:id="R508a639c36104acf"/>
-    <p:sldId xmlns:r="http://schemas.openxmlformats.org/officeDocument/2006/relationships" id="260" r:id="Rb3519f6754d54170"/>
-    <p:sldId xmlns:r="http://schemas.openxmlformats.org/officeDocument/2006/relationships" id="261" r:id="R46a1df6843274a12"/>
-    <p:sldId xmlns:r="http://schemas.openxmlformats.org/officeDocument/2006/relationships" id="262" r:id="Rbb0bc73f2b8740db"/>
-    <p:sldId xmlns:r="http://schemas.openxmlformats.org/officeDocument/2006/relationships" id="263" r:id="Re0a522d9f194477f"/>
-    <p:sldId xmlns:r="http://schemas.openxmlformats.org/officeDocument/2006/relationships" id="264" r:id="Rff7b57df2d044218"/>
+    <p:sldId xmlns:r="http://schemas.openxmlformats.org/officeDocument/2006/relationships" id="256" r:id="R1c4cc8b9ef4a4762"/>
+    <p:sldId xmlns:r="http://schemas.openxmlformats.org/officeDocument/2006/relationships" id="257" r:id="Ra9a360539b52407e"/>
+    <p:sldId xmlns:r="http://schemas.openxmlformats.org/officeDocument/2006/relationships" id="258" r:id="Rb4e5c29dbcfb4b66"/>
+    <p:sldId xmlns:r="http://schemas.openxmlformats.org/officeDocument/2006/relationships" id="259" r:id="Rfd69a4ef63d64cfd"/>
+    <p:sldId xmlns:r="http://schemas.openxmlformats.org/officeDocument/2006/relationships" id="260" r:id="R3897ac29d2dd4fed"/>
+    <p:sldId xmlns:r="http://schemas.openxmlformats.org/officeDocument/2006/relationships" id="261" r:id="Rf7241c413bb84128"/>
+    <p:sldId xmlns:r="http://schemas.openxmlformats.org/officeDocument/2006/relationships" id="262" r:id="R36d9c3929c8f448b"/>
+    <p:sldId xmlns:r="http://schemas.openxmlformats.org/officeDocument/2006/relationships" id="263" r:id="R6b2c368701da4b75"/>
+    <p:sldId xmlns:r="http://schemas.openxmlformats.org/officeDocument/2006/relationships" id="264" r:id="R3337c0000962427b"/>
   </p:sldIdLst>
   <p:sldSz cx="12192000" cy="6858000"/>
   <p:notesSz cx="6858000" cy="9144000"/>
   <p:embeddedFontLst>
     <p:embeddedFont>
       <p:font typeface="JetBrains Mono"/>
-      <p:regular xmlns:r="http://schemas.openxmlformats.org/officeDocument/2006/relationships" r:id="Ra3e2c76a3fd44b4d"/>
+      <p:regular xmlns:r="http://schemas.openxmlformats.org/officeDocument/2006/relationships" r:id="R8bcdea47c8574893"/>
     </p:embeddedFont>
   </p:embeddedFontLst>
 </p:presentation>
@@ -1071,7 +1071,7 @@
           <p:nvPr/>
         </p:nvPicPr>
         <p:blipFill rotWithShape="1">
-          <a:blip xmlns:r="http://schemas.openxmlformats.org/officeDocument/2006/relationships" xmlns:a="http://schemas.openxmlformats.org/drawingml/2006/main" r:embed="R16d7565a1ca74f74"/>
+          <a:blip xmlns:r="http://schemas.openxmlformats.org/officeDocument/2006/relationships" xmlns:a="http://schemas.openxmlformats.org/drawingml/2006/main" r:embed="Rc4f878e83c7d4f1a"/>
           <a:stretch xmlns:a="http://schemas.openxmlformats.org/drawingml/2006/main"/>
         </p:blipFill>
         <p:spPr>
@@ -1451,7 +1451,7 @@
           <p:nvPr/>
         </p:nvPicPr>
         <p:blipFill rotWithShape="1">
-          <a:blip xmlns:r="http://schemas.openxmlformats.org/officeDocument/2006/relationships" xmlns:a="http://schemas.openxmlformats.org/drawingml/2006/main" r:embed="Ra9f4b22d537f4fb2">
+          <a:blip xmlns:r="http://schemas.openxmlformats.org/officeDocument/2006/relationships" xmlns:a="http://schemas.openxmlformats.org/drawingml/2006/main" r:embed="Re1458dde7e9546e3">
             <a:alphaModFix amt="28000"/>
           </a:blip>
           <a:stretch xmlns:a="http://schemas.openxmlformats.org/drawingml/2006/main"/>
@@ -1664,7 +1664,7 @@
           <p:nvPr/>
         </p:nvPicPr>
         <p:blipFill rotWithShape="1">
-          <a:blip xmlns:r="http://schemas.openxmlformats.org/officeDocument/2006/relationships" xmlns:a="http://schemas.openxmlformats.org/drawingml/2006/main" r:embed="Ref6f58384f5b475d">
+          <a:blip xmlns:r="http://schemas.openxmlformats.org/officeDocument/2006/relationships" xmlns:a="http://schemas.openxmlformats.org/drawingml/2006/main" r:embed="R9326e99ebd8c46ef">
             <a:alphaModFix amt="28000"/>
           </a:blip>
           <a:stretch xmlns:a="http://schemas.openxmlformats.org/drawingml/2006/main"/>
@@ -1899,7 +1899,7 @@
           <p:nvPr/>
         </p:nvPicPr>
         <p:blipFill rotWithShape="1">
-          <a:blip xmlns:r="http://schemas.openxmlformats.org/officeDocument/2006/relationships" xmlns:a="http://schemas.openxmlformats.org/drawingml/2006/main" r:embed="Rb6db4b2699d9466f">
+          <a:blip xmlns:r="http://schemas.openxmlformats.org/officeDocument/2006/relationships" xmlns:a="http://schemas.openxmlformats.org/drawingml/2006/main" r:embed="R23b60de6f4a54db1">
             <a:alphaModFix amt="28000"/>
           </a:blip>
           <a:stretch xmlns:a="http://schemas.openxmlformats.org/drawingml/2006/main"/>
@@ -2176,7 +2176,7 @@
           <p:nvPr/>
         </p:nvPicPr>
         <p:blipFill rotWithShape="1">
-          <a:blip xmlns:r="http://schemas.openxmlformats.org/officeDocument/2006/relationships" xmlns:a="http://schemas.openxmlformats.org/drawingml/2006/main" r:embed="R8bd450488787437a">
+          <a:blip xmlns:r="http://schemas.openxmlformats.org/officeDocument/2006/relationships" xmlns:a="http://schemas.openxmlformats.org/drawingml/2006/main" r:embed="Ra28c37e61fde4322">
             <a:alphaModFix amt="28000"/>
           </a:blip>
           <a:stretch xmlns:a="http://schemas.openxmlformats.org/drawingml/2006/main"/>
@@ -2451,7 +2451,7 @@
           <p:nvPr/>
         </p:nvPicPr>
         <p:blipFill rotWithShape="1">
-          <a:blip xmlns:r="http://schemas.openxmlformats.org/officeDocument/2006/relationships" xmlns:a="http://schemas.openxmlformats.org/drawingml/2006/main" r:embed="Re5a85321a9c04e7d">
+          <a:blip xmlns:r="http://schemas.openxmlformats.org/officeDocument/2006/relationships" xmlns:a="http://schemas.openxmlformats.org/drawingml/2006/main" r:embed="Rb1f8e76eeea9478c">
             <a:alphaModFix amt="28000"/>
           </a:blip>
           <a:stretch xmlns:a="http://schemas.openxmlformats.org/drawingml/2006/main"/>
@@ -2875,7 +2875,7 @@
           <p:nvPr/>
         </p:nvPicPr>
         <p:blipFill rotWithShape="1">
-          <a:blip xmlns:r="http://schemas.openxmlformats.org/officeDocument/2006/relationships" xmlns:a="http://schemas.openxmlformats.org/drawingml/2006/main" r:embed="Ra68a2feff739471c">
+          <a:blip xmlns:r="http://schemas.openxmlformats.org/officeDocument/2006/relationships" xmlns:a="http://schemas.openxmlformats.org/drawingml/2006/main" r:embed="R455d3a49f7944841">
             <a:alphaModFix amt="28000"/>
           </a:blip>
           <a:stretch xmlns:a="http://schemas.openxmlformats.org/drawingml/2006/main"/>
@@ -3016,7 +3016,7 @@
           <p:nvPr/>
         </p:nvPicPr>
         <p:blipFill rotWithShape="1">
-          <a:blip xmlns:r="http://schemas.openxmlformats.org/officeDocument/2006/relationships" xmlns:a="http://schemas.openxmlformats.org/drawingml/2006/main" r:embed="R83dba1086fdf4227">
+          <a:blip xmlns:r="http://schemas.openxmlformats.org/officeDocument/2006/relationships" xmlns:a="http://schemas.openxmlformats.org/drawingml/2006/main" r:embed="R7a9ba73378974da7">
             <a:alphaModFix amt="28000"/>
           </a:blip>
           <a:stretch xmlns:a="http://schemas.openxmlformats.org/drawingml/2006/main"/>
@@ -3130,7 +3130,7 @@
           <p:nvPr/>
         </p:nvPicPr>
         <p:blipFill rotWithShape="1">
-          <a:blip xmlns:r="http://schemas.openxmlformats.org/officeDocument/2006/relationships" xmlns:a="http://schemas.openxmlformats.org/drawingml/2006/main" r:embed="Rf749a7d23d004c53">
+          <a:blip xmlns:r="http://schemas.openxmlformats.org/officeDocument/2006/relationships" xmlns:a="http://schemas.openxmlformats.org/drawingml/2006/main" r:embed="R363c878fa55e4259">
             <a:alphaModFix amt="28000"/>
           </a:blip>
           <a:stretch xmlns:a="http://schemas.openxmlformats.org/drawingml/2006/main"/>
@@ -3457,7 +3457,7 @@
           <p:nvPr/>
         </p:nvPicPr>
         <p:blipFill rotWithShape="1">
-          <a:blip xmlns:r="http://schemas.openxmlformats.org/officeDocument/2006/relationships" xmlns:a="http://schemas.openxmlformats.org/drawingml/2006/main" r:embed="R244d03e349244319">
+          <a:blip xmlns:r="http://schemas.openxmlformats.org/officeDocument/2006/relationships" xmlns:a="http://schemas.openxmlformats.org/drawingml/2006/main" r:embed="R7a8e1faaf0184169">
             <a:alphaModFix amt="28000"/>
           </a:blip>
           <a:stretch xmlns:a="http://schemas.openxmlformats.org/drawingml/2006/main"/>
@@ -3745,7 +3745,7 @@
           <p:nvPr/>
         </p:nvPicPr>
         <p:blipFill rotWithShape="1">
-          <a:blip xmlns:r="http://schemas.openxmlformats.org/officeDocument/2006/relationships" xmlns:a="http://schemas.openxmlformats.org/drawingml/2006/main" r:embed="Rc904dfd410e34775">
+          <a:blip xmlns:r="http://schemas.openxmlformats.org/officeDocument/2006/relationships" xmlns:a="http://schemas.openxmlformats.org/drawingml/2006/main" r:embed="Rf647d16b89514e54">
             <a:alphaModFix amt="28000"/>
           </a:blip>
           <a:stretch xmlns:a="http://schemas.openxmlformats.org/drawingml/2006/main"/>
@@ -3982,17 +3982,17 @@
   </p:cSld>
   <p:clrMap bg1="lt1" tx1="dk1" bg2="lt2" tx2="dk2" accent1="accent1" accent2="accent2" accent3="accent3" accent4="accent4" accent5="accent5" accent6="accent6" hlink="hlink" folHlink="folHlink"/>
   <p:sldLayoutIdLst>
-    <p:sldLayoutId xmlns:r="http://schemas.openxmlformats.org/officeDocument/2006/relationships" id="2147483649" r:id="R00928b18e4f5431a"/>
-    <p:sldLayoutId xmlns:r="http://schemas.openxmlformats.org/officeDocument/2006/relationships" id="2147483650" r:id="Rfd38fb1a6aaa4759"/>
-    <p:sldLayoutId xmlns:r="http://schemas.openxmlformats.org/officeDocument/2006/relationships" id="2147483651" r:id="R53c0c5e908fb45d0"/>
-    <p:sldLayoutId xmlns:r="http://schemas.openxmlformats.org/officeDocument/2006/relationships" id="2147483652" r:id="Rf049e6b78e3a4deb"/>
-    <p:sldLayoutId xmlns:r="http://schemas.openxmlformats.org/officeDocument/2006/relationships" id="2147483653" r:id="Re7bac8cf568748d3"/>
-    <p:sldLayoutId xmlns:r="http://schemas.openxmlformats.org/officeDocument/2006/relationships" id="2147483654" r:id="R7718af293fa540e0"/>
-    <p:sldLayoutId xmlns:r="http://schemas.openxmlformats.org/officeDocument/2006/relationships" id="2147483655" r:id="Rc0c81028f0824550"/>
-    <p:sldLayoutId xmlns:r="http://schemas.openxmlformats.org/officeDocument/2006/relationships" id="2147483656" r:id="R086e513bffc944b6"/>
-    <p:sldLayoutId xmlns:r="http://schemas.openxmlformats.org/officeDocument/2006/relationships" id="2147483657" r:id="Rbe7f625f47814385"/>
-    <p:sldLayoutId xmlns:r="http://schemas.openxmlformats.org/officeDocument/2006/relationships" id="2147483658" r:id="R7de9d4e394c94e79"/>
-    <p:sldLayoutId xmlns:r="http://schemas.openxmlformats.org/officeDocument/2006/relationships" id="2147483659" r:id="Rab16d0c9cb854beb"/>
+    <p:sldLayoutId xmlns:r="http://schemas.openxmlformats.org/officeDocument/2006/relationships" id="2147483649" r:id="Rff23cecb4f6f47f9"/>
+    <p:sldLayoutId xmlns:r="http://schemas.openxmlformats.org/officeDocument/2006/relationships" id="2147483650" r:id="R8c269ce3f9ff4c5f"/>
+    <p:sldLayoutId xmlns:r="http://schemas.openxmlformats.org/officeDocument/2006/relationships" id="2147483651" r:id="R736ab34b759c4c93"/>
+    <p:sldLayoutId xmlns:r="http://schemas.openxmlformats.org/officeDocument/2006/relationships" id="2147483652" r:id="R8e5cdb1a27ce42a0"/>
+    <p:sldLayoutId xmlns:r="http://schemas.openxmlformats.org/officeDocument/2006/relationships" id="2147483653" r:id="Rfa26000fc9c34b94"/>
+    <p:sldLayoutId xmlns:r="http://schemas.openxmlformats.org/officeDocument/2006/relationships" id="2147483654" r:id="Red74b50d234f4a03"/>
+    <p:sldLayoutId xmlns:r="http://schemas.openxmlformats.org/officeDocument/2006/relationships" id="2147483655" r:id="Reb51577a07734845"/>
+    <p:sldLayoutId xmlns:r="http://schemas.openxmlformats.org/officeDocument/2006/relationships" id="2147483656" r:id="R3fdd61cbe95c4e44"/>
+    <p:sldLayoutId xmlns:r="http://schemas.openxmlformats.org/officeDocument/2006/relationships" id="2147483657" r:id="Rc39cf04f1d1342b2"/>
+    <p:sldLayoutId xmlns:r="http://schemas.openxmlformats.org/officeDocument/2006/relationships" id="2147483658" r:id="R902003a4a59d4410"/>
+    <p:sldLayoutId xmlns:r="http://schemas.openxmlformats.org/officeDocument/2006/relationships" id="2147483659" r:id="R78d942638aea46da"/>
   </p:sldLayoutIdLst>
   <p:hf hdr="0" ftr="0" dt="0"/>
   <p:txStyles>
@@ -8183,7 +8183,7 @@
             <a:r>
               <a:rPr sz="2050" b="0">
                 <a:solidFill>
-                  <a:srgbClr val="1750EB"/>
+                  <a:srgbClr val="C45E00"/>
                 </a:solidFill>
                 <a:latin typeface="JetBrains Mono"/>
                 <a:ea typeface="JetBrains Mono"/>
@@ -9154,7 +9154,7 @@
             <a:r>
               <a:rPr sz="2050" b="0">
                 <a:solidFill>
-                  <a:srgbClr val="1750EB"/>
+                  <a:srgbClr val="C45E00"/>
                 </a:solidFill>
                 <a:latin typeface="JetBrains Mono"/>
                 <a:ea typeface="JetBrains Mono"/>

--- a/Mapped Curriculum Lessons/Grade 8/Lesson 28 - Reading 2D Lists/Reading 2D Lists - Slides.pptx
+++ b/Mapped Curriculum Lessons/Grade 8/Lesson 28 - Reading 2D Lists/Reading 2D Lists - Slides.pptx
@@ -2,28 +2,28 @@
 <file path=ppt/presentation.xml><?xml version="1.0" encoding="utf-8"?>
 <p:presentation xmlns:p="http://schemas.openxmlformats.org/presentationml/2006/main" embedTrueTypeFonts="1" saveSubsetFonts="0">
   <p:sldMasterIdLst>
-    <p:sldMasterId xmlns:r="http://schemas.openxmlformats.org/officeDocument/2006/relationships" id="2147483648" r:id="R0c78d4ada97f431f"/>
+    <p:sldMasterId xmlns:r="http://schemas.openxmlformats.org/officeDocument/2006/relationships" id="2147483648" r:id="R3412e305cd1941c4"/>
   </p:sldMasterIdLst>
   <p:notesMasterIdLst>
-    <p:notesMasterId xmlns:r="http://schemas.openxmlformats.org/officeDocument/2006/relationships" r:id="R3335c189b7e14fb0"/>
+    <p:notesMasterId xmlns:r="http://schemas.openxmlformats.org/officeDocument/2006/relationships" r:id="R4d32008ef57a439f"/>
   </p:notesMasterIdLst>
   <p:sldIdLst>
-    <p:sldId xmlns:r="http://schemas.openxmlformats.org/officeDocument/2006/relationships" id="256" r:id="R1c4cc8b9ef4a4762"/>
-    <p:sldId xmlns:r="http://schemas.openxmlformats.org/officeDocument/2006/relationships" id="257" r:id="Ra9a360539b52407e"/>
-    <p:sldId xmlns:r="http://schemas.openxmlformats.org/officeDocument/2006/relationships" id="258" r:id="Rb4e5c29dbcfb4b66"/>
-    <p:sldId xmlns:r="http://schemas.openxmlformats.org/officeDocument/2006/relationships" id="259" r:id="Rfd69a4ef63d64cfd"/>
-    <p:sldId xmlns:r="http://schemas.openxmlformats.org/officeDocument/2006/relationships" id="260" r:id="R3897ac29d2dd4fed"/>
-    <p:sldId xmlns:r="http://schemas.openxmlformats.org/officeDocument/2006/relationships" id="261" r:id="Rf7241c413bb84128"/>
-    <p:sldId xmlns:r="http://schemas.openxmlformats.org/officeDocument/2006/relationships" id="262" r:id="R36d9c3929c8f448b"/>
-    <p:sldId xmlns:r="http://schemas.openxmlformats.org/officeDocument/2006/relationships" id="263" r:id="R6b2c368701da4b75"/>
-    <p:sldId xmlns:r="http://schemas.openxmlformats.org/officeDocument/2006/relationships" id="264" r:id="R3337c0000962427b"/>
+    <p:sldId xmlns:r="http://schemas.openxmlformats.org/officeDocument/2006/relationships" id="256" r:id="R5f45abfe6b8f47e1"/>
+    <p:sldId xmlns:r="http://schemas.openxmlformats.org/officeDocument/2006/relationships" id="257" r:id="Rc92fca0314804da8"/>
+    <p:sldId xmlns:r="http://schemas.openxmlformats.org/officeDocument/2006/relationships" id="258" r:id="Rbceae63ce9af4311"/>
+    <p:sldId xmlns:r="http://schemas.openxmlformats.org/officeDocument/2006/relationships" id="259" r:id="R6323bc8813b34c3e"/>
+    <p:sldId xmlns:r="http://schemas.openxmlformats.org/officeDocument/2006/relationships" id="260" r:id="R2420e0206033408d"/>
+    <p:sldId xmlns:r="http://schemas.openxmlformats.org/officeDocument/2006/relationships" id="261" r:id="Ra459f7a41ed94e0a"/>
+    <p:sldId xmlns:r="http://schemas.openxmlformats.org/officeDocument/2006/relationships" id="262" r:id="R392eb2d529754939"/>
+    <p:sldId xmlns:r="http://schemas.openxmlformats.org/officeDocument/2006/relationships" id="263" r:id="R89e747ef03724b5e"/>
+    <p:sldId xmlns:r="http://schemas.openxmlformats.org/officeDocument/2006/relationships" id="264" r:id="R038368acd23a4a1f"/>
   </p:sldIdLst>
   <p:sldSz cx="12192000" cy="6858000"/>
   <p:notesSz cx="6858000" cy="9144000"/>
   <p:embeddedFontLst>
     <p:embeddedFont>
       <p:font typeface="JetBrains Mono"/>
-      <p:regular xmlns:r="http://schemas.openxmlformats.org/officeDocument/2006/relationships" r:id="R8bcdea47c8574893"/>
+      <p:regular xmlns:r="http://schemas.openxmlformats.org/officeDocument/2006/relationships" r:id="Reb5ae64a50824214"/>
     </p:embeddedFont>
   </p:embeddedFontLst>
 </p:presentation>
@@ -1071,7 +1071,7 @@
           <p:nvPr/>
         </p:nvPicPr>
         <p:blipFill rotWithShape="1">
-          <a:blip xmlns:r="http://schemas.openxmlformats.org/officeDocument/2006/relationships" xmlns:a="http://schemas.openxmlformats.org/drawingml/2006/main" r:embed="Rc4f878e83c7d4f1a"/>
+          <a:blip xmlns:r="http://schemas.openxmlformats.org/officeDocument/2006/relationships" xmlns:a="http://schemas.openxmlformats.org/drawingml/2006/main" r:embed="R292266e7de0d4af7"/>
           <a:stretch xmlns:a="http://schemas.openxmlformats.org/drawingml/2006/main"/>
         </p:blipFill>
         <p:spPr>
@@ -1451,7 +1451,7 @@
           <p:nvPr/>
         </p:nvPicPr>
         <p:blipFill rotWithShape="1">
-          <a:blip xmlns:r="http://schemas.openxmlformats.org/officeDocument/2006/relationships" xmlns:a="http://schemas.openxmlformats.org/drawingml/2006/main" r:embed="Re1458dde7e9546e3">
+          <a:blip xmlns:r="http://schemas.openxmlformats.org/officeDocument/2006/relationships" xmlns:a="http://schemas.openxmlformats.org/drawingml/2006/main" r:embed="R2b569099c4f24163">
             <a:alphaModFix amt="28000"/>
           </a:blip>
           <a:stretch xmlns:a="http://schemas.openxmlformats.org/drawingml/2006/main"/>
@@ -1664,7 +1664,7 @@
           <p:nvPr/>
         </p:nvPicPr>
         <p:blipFill rotWithShape="1">
-          <a:blip xmlns:r="http://schemas.openxmlformats.org/officeDocument/2006/relationships" xmlns:a="http://schemas.openxmlformats.org/drawingml/2006/main" r:embed="R9326e99ebd8c46ef">
+          <a:blip xmlns:r="http://schemas.openxmlformats.org/officeDocument/2006/relationships" xmlns:a="http://schemas.openxmlformats.org/drawingml/2006/main" r:embed="R9e7d0dd1bc004f0d">
             <a:alphaModFix amt="28000"/>
           </a:blip>
           <a:stretch xmlns:a="http://schemas.openxmlformats.org/drawingml/2006/main"/>
@@ -1899,7 +1899,7 @@
           <p:nvPr/>
         </p:nvPicPr>
         <p:blipFill rotWithShape="1">
-          <a:blip xmlns:r="http://schemas.openxmlformats.org/officeDocument/2006/relationships" xmlns:a="http://schemas.openxmlformats.org/drawingml/2006/main" r:embed="R23b60de6f4a54db1">
+          <a:blip xmlns:r="http://schemas.openxmlformats.org/officeDocument/2006/relationships" xmlns:a="http://schemas.openxmlformats.org/drawingml/2006/main" r:embed="R2fb09560a1b345b2">
             <a:alphaModFix amt="28000"/>
           </a:blip>
           <a:stretch xmlns:a="http://schemas.openxmlformats.org/drawingml/2006/main"/>
@@ -2176,7 +2176,7 @@
           <p:nvPr/>
         </p:nvPicPr>
         <p:blipFill rotWithShape="1">
-          <a:blip xmlns:r="http://schemas.openxmlformats.org/officeDocument/2006/relationships" xmlns:a="http://schemas.openxmlformats.org/drawingml/2006/main" r:embed="Ra28c37e61fde4322">
+          <a:blip xmlns:r="http://schemas.openxmlformats.org/officeDocument/2006/relationships" xmlns:a="http://schemas.openxmlformats.org/drawingml/2006/main" r:embed="R56ec0681cd5b4735">
             <a:alphaModFix amt="28000"/>
           </a:blip>
           <a:stretch xmlns:a="http://schemas.openxmlformats.org/drawingml/2006/main"/>
@@ -2451,7 +2451,7 @@
           <p:nvPr/>
         </p:nvPicPr>
         <p:blipFill rotWithShape="1">
-          <a:blip xmlns:r="http://schemas.openxmlformats.org/officeDocument/2006/relationships" xmlns:a="http://schemas.openxmlformats.org/drawingml/2006/main" r:embed="Rb1f8e76eeea9478c">
+          <a:blip xmlns:r="http://schemas.openxmlformats.org/officeDocument/2006/relationships" xmlns:a="http://schemas.openxmlformats.org/drawingml/2006/main" r:embed="Rcd4c727e2b834d58">
             <a:alphaModFix amt="28000"/>
           </a:blip>
           <a:stretch xmlns:a="http://schemas.openxmlformats.org/drawingml/2006/main"/>
@@ -2875,7 +2875,7 @@
           <p:nvPr/>
         </p:nvPicPr>
         <p:blipFill rotWithShape="1">
-          <a:blip xmlns:r="http://schemas.openxmlformats.org/officeDocument/2006/relationships" xmlns:a="http://schemas.openxmlformats.org/drawingml/2006/main" r:embed="R455d3a49f7944841">
+          <a:blip xmlns:r="http://schemas.openxmlformats.org/officeDocument/2006/relationships" xmlns:a="http://schemas.openxmlformats.org/drawingml/2006/main" r:embed="Rd86a9c456831401d">
             <a:alphaModFix amt="28000"/>
           </a:blip>
           <a:stretch xmlns:a="http://schemas.openxmlformats.org/drawingml/2006/main"/>
@@ -3016,7 +3016,7 @@
           <p:nvPr/>
         </p:nvPicPr>
         <p:blipFill rotWithShape="1">
-          <a:blip xmlns:r="http://schemas.openxmlformats.org/officeDocument/2006/relationships" xmlns:a="http://schemas.openxmlformats.org/drawingml/2006/main" r:embed="R7a9ba73378974da7">
+          <a:blip xmlns:r="http://schemas.openxmlformats.org/officeDocument/2006/relationships" xmlns:a="http://schemas.openxmlformats.org/drawingml/2006/main" r:embed="R5035dd466aa54bad">
             <a:alphaModFix amt="28000"/>
           </a:blip>
           <a:stretch xmlns:a="http://schemas.openxmlformats.org/drawingml/2006/main"/>
@@ -3130,7 +3130,7 @@
           <p:nvPr/>
         </p:nvPicPr>
         <p:blipFill rotWithShape="1">
-          <a:blip xmlns:r="http://schemas.openxmlformats.org/officeDocument/2006/relationships" xmlns:a="http://schemas.openxmlformats.org/drawingml/2006/main" r:embed="R363c878fa55e4259">
+          <a:blip xmlns:r="http://schemas.openxmlformats.org/officeDocument/2006/relationships" xmlns:a="http://schemas.openxmlformats.org/drawingml/2006/main" r:embed="R7738ff08ec7a4428">
             <a:alphaModFix amt="28000"/>
           </a:blip>
           <a:stretch xmlns:a="http://schemas.openxmlformats.org/drawingml/2006/main"/>
@@ -3457,7 +3457,7 @@
           <p:nvPr/>
         </p:nvPicPr>
         <p:blipFill rotWithShape="1">
-          <a:blip xmlns:r="http://schemas.openxmlformats.org/officeDocument/2006/relationships" xmlns:a="http://schemas.openxmlformats.org/drawingml/2006/main" r:embed="R7a8e1faaf0184169">
+          <a:blip xmlns:r="http://schemas.openxmlformats.org/officeDocument/2006/relationships" xmlns:a="http://schemas.openxmlformats.org/drawingml/2006/main" r:embed="R9e3d36952e264b5c">
             <a:alphaModFix amt="28000"/>
           </a:blip>
           <a:stretch xmlns:a="http://schemas.openxmlformats.org/drawingml/2006/main"/>
@@ -3745,7 +3745,7 @@
           <p:nvPr/>
         </p:nvPicPr>
         <p:blipFill rotWithShape="1">
-          <a:blip xmlns:r="http://schemas.openxmlformats.org/officeDocument/2006/relationships" xmlns:a="http://schemas.openxmlformats.org/drawingml/2006/main" r:embed="Rf647d16b89514e54">
+          <a:blip xmlns:r="http://schemas.openxmlformats.org/officeDocument/2006/relationships" xmlns:a="http://schemas.openxmlformats.org/drawingml/2006/main" r:embed="R384e7f4bbf724d05">
             <a:alphaModFix amt="28000"/>
           </a:blip>
           <a:stretch xmlns:a="http://schemas.openxmlformats.org/drawingml/2006/main"/>
@@ -3982,17 +3982,17 @@
   </p:cSld>
   <p:clrMap bg1="lt1" tx1="dk1" bg2="lt2" tx2="dk2" accent1="accent1" accent2="accent2" accent3="accent3" accent4="accent4" accent5="accent5" accent6="accent6" hlink="hlink" folHlink="folHlink"/>
   <p:sldLayoutIdLst>
-    <p:sldLayoutId xmlns:r="http://schemas.openxmlformats.org/officeDocument/2006/relationships" id="2147483649" r:id="Rff23cecb4f6f47f9"/>
-    <p:sldLayoutId xmlns:r="http://schemas.openxmlformats.org/officeDocument/2006/relationships" id="2147483650" r:id="R8c269ce3f9ff4c5f"/>
-    <p:sldLayoutId xmlns:r="http://schemas.openxmlformats.org/officeDocument/2006/relationships" id="2147483651" r:id="R736ab34b759c4c93"/>
-    <p:sldLayoutId xmlns:r="http://schemas.openxmlformats.org/officeDocument/2006/relationships" id="2147483652" r:id="R8e5cdb1a27ce42a0"/>
-    <p:sldLayoutId xmlns:r="http://schemas.openxmlformats.org/officeDocument/2006/relationships" id="2147483653" r:id="Rfa26000fc9c34b94"/>
-    <p:sldLayoutId xmlns:r="http://schemas.openxmlformats.org/officeDocument/2006/relationships" id="2147483654" r:id="Red74b50d234f4a03"/>
-    <p:sldLayoutId xmlns:r="http://schemas.openxmlformats.org/officeDocument/2006/relationships" id="2147483655" r:id="Reb51577a07734845"/>
-    <p:sldLayoutId xmlns:r="http://schemas.openxmlformats.org/officeDocument/2006/relationships" id="2147483656" r:id="R3fdd61cbe95c4e44"/>
-    <p:sldLayoutId xmlns:r="http://schemas.openxmlformats.org/officeDocument/2006/relationships" id="2147483657" r:id="Rc39cf04f1d1342b2"/>
-    <p:sldLayoutId xmlns:r="http://schemas.openxmlformats.org/officeDocument/2006/relationships" id="2147483658" r:id="R902003a4a59d4410"/>
-    <p:sldLayoutId xmlns:r="http://schemas.openxmlformats.org/officeDocument/2006/relationships" id="2147483659" r:id="R78d942638aea46da"/>
+    <p:sldLayoutId xmlns:r="http://schemas.openxmlformats.org/officeDocument/2006/relationships" id="2147483649" r:id="Rc76d3b0678bd4326"/>
+    <p:sldLayoutId xmlns:r="http://schemas.openxmlformats.org/officeDocument/2006/relationships" id="2147483650" r:id="R07fe1f16c9f84e1f"/>
+    <p:sldLayoutId xmlns:r="http://schemas.openxmlformats.org/officeDocument/2006/relationships" id="2147483651" r:id="R0c4331fc2737436e"/>
+    <p:sldLayoutId xmlns:r="http://schemas.openxmlformats.org/officeDocument/2006/relationships" id="2147483652" r:id="R64bdb53c93fa42f2"/>
+    <p:sldLayoutId xmlns:r="http://schemas.openxmlformats.org/officeDocument/2006/relationships" id="2147483653" r:id="R120cbbf6f68f455b"/>
+    <p:sldLayoutId xmlns:r="http://schemas.openxmlformats.org/officeDocument/2006/relationships" id="2147483654" r:id="R6cce2df947c546f1"/>
+    <p:sldLayoutId xmlns:r="http://schemas.openxmlformats.org/officeDocument/2006/relationships" id="2147483655" r:id="Rd88cfb9ab3b54310"/>
+    <p:sldLayoutId xmlns:r="http://schemas.openxmlformats.org/officeDocument/2006/relationships" id="2147483656" r:id="R13a923f5b7374835"/>
+    <p:sldLayoutId xmlns:r="http://schemas.openxmlformats.org/officeDocument/2006/relationships" id="2147483657" r:id="R181ff3d1d95f4512"/>
+    <p:sldLayoutId xmlns:r="http://schemas.openxmlformats.org/officeDocument/2006/relationships" id="2147483658" r:id="R323ca8a109404372"/>
+    <p:sldLayoutId xmlns:r="http://schemas.openxmlformats.org/officeDocument/2006/relationships" id="2147483659" r:id="R1ba5a54b6209426e"/>
   </p:sldLayoutIdLst>
   <p:hf hdr="0" ftr="0" dt="0"/>
   <p:txStyles>

--- a/Mapped Curriculum Lessons/Grade 8/Lesson 28 - Reading 2D Lists/Reading 2D Lists - Slides.pptx
+++ b/Mapped Curriculum Lessons/Grade 8/Lesson 28 - Reading 2D Lists/Reading 2D Lists - Slides.pptx
@@ -2,28 +2,28 @@
 <file path=ppt/presentation.xml><?xml version="1.0" encoding="utf-8"?>
 <p:presentation xmlns:p="http://schemas.openxmlformats.org/presentationml/2006/main" embedTrueTypeFonts="1" saveSubsetFonts="0">
   <p:sldMasterIdLst>
-    <p:sldMasterId xmlns:r="http://schemas.openxmlformats.org/officeDocument/2006/relationships" id="2147483648" r:id="R3412e305cd1941c4"/>
+    <p:sldMasterId xmlns:r="http://schemas.openxmlformats.org/officeDocument/2006/relationships" id="2147483648" r:id="R77d2d7fff92f4ab8"/>
   </p:sldMasterIdLst>
   <p:notesMasterIdLst>
-    <p:notesMasterId xmlns:r="http://schemas.openxmlformats.org/officeDocument/2006/relationships" r:id="R4d32008ef57a439f"/>
+    <p:notesMasterId xmlns:r="http://schemas.openxmlformats.org/officeDocument/2006/relationships" r:id="Rb2761e2976764e8b"/>
   </p:notesMasterIdLst>
   <p:sldIdLst>
-    <p:sldId xmlns:r="http://schemas.openxmlformats.org/officeDocument/2006/relationships" id="256" r:id="R5f45abfe6b8f47e1"/>
-    <p:sldId xmlns:r="http://schemas.openxmlformats.org/officeDocument/2006/relationships" id="257" r:id="Rc92fca0314804da8"/>
-    <p:sldId xmlns:r="http://schemas.openxmlformats.org/officeDocument/2006/relationships" id="258" r:id="Rbceae63ce9af4311"/>
-    <p:sldId xmlns:r="http://schemas.openxmlformats.org/officeDocument/2006/relationships" id="259" r:id="R6323bc8813b34c3e"/>
-    <p:sldId xmlns:r="http://schemas.openxmlformats.org/officeDocument/2006/relationships" id="260" r:id="R2420e0206033408d"/>
-    <p:sldId xmlns:r="http://schemas.openxmlformats.org/officeDocument/2006/relationships" id="261" r:id="Ra459f7a41ed94e0a"/>
-    <p:sldId xmlns:r="http://schemas.openxmlformats.org/officeDocument/2006/relationships" id="262" r:id="R392eb2d529754939"/>
-    <p:sldId xmlns:r="http://schemas.openxmlformats.org/officeDocument/2006/relationships" id="263" r:id="R89e747ef03724b5e"/>
-    <p:sldId xmlns:r="http://schemas.openxmlformats.org/officeDocument/2006/relationships" id="264" r:id="R038368acd23a4a1f"/>
+    <p:sldId xmlns:r="http://schemas.openxmlformats.org/officeDocument/2006/relationships" id="256" r:id="R250357f049104bab"/>
+    <p:sldId xmlns:r="http://schemas.openxmlformats.org/officeDocument/2006/relationships" id="257" r:id="Rdd25fa02509f4353"/>
+    <p:sldId xmlns:r="http://schemas.openxmlformats.org/officeDocument/2006/relationships" id="258" r:id="Rafa2e6e8b1f04bd7"/>
+    <p:sldId xmlns:r="http://schemas.openxmlformats.org/officeDocument/2006/relationships" id="259" r:id="R559d251998d34a66"/>
+    <p:sldId xmlns:r="http://schemas.openxmlformats.org/officeDocument/2006/relationships" id="260" r:id="R6c052559888a4dee"/>
+    <p:sldId xmlns:r="http://schemas.openxmlformats.org/officeDocument/2006/relationships" id="261" r:id="R9bf3f830655f4377"/>
+    <p:sldId xmlns:r="http://schemas.openxmlformats.org/officeDocument/2006/relationships" id="262" r:id="Rcbd27dbca92b4dbe"/>
+    <p:sldId xmlns:r="http://schemas.openxmlformats.org/officeDocument/2006/relationships" id="263" r:id="Rd49f65d0ef384793"/>
+    <p:sldId xmlns:r="http://schemas.openxmlformats.org/officeDocument/2006/relationships" id="264" r:id="Rf42cea064f494e58"/>
   </p:sldIdLst>
   <p:sldSz cx="12192000" cy="6858000"/>
   <p:notesSz cx="6858000" cy="9144000"/>
   <p:embeddedFontLst>
     <p:embeddedFont>
       <p:font typeface="JetBrains Mono"/>
-      <p:regular xmlns:r="http://schemas.openxmlformats.org/officeDocument/2006/relationships" r:id="Reb5ae64a50824214"/>
+      <p:regular xmlns:r="http://schemas.openxmlformats.org/officeDocument/2006/relationships" r:id="R44b59bd1fc704028"/>
     </p:embeddedFont>
   </p:embeddedFontLst>
 </p:presentation>
@@ -1071,7 +1071,7 @@
           <p:nvPr/>
         </p:nvPicPr>
         <p:blipFill rotWithShape="1">
-          <a:blip xmlns:r="http://schemas.openxmlformats.org/officeDocument/2006/relationships" xmlns:a="http://schemas.openxmlformats.org/drawingml/2006/main" r:embed="R292266e7de0d4af7"/>
+          <a:blip xmlns:r="http://schemas.openxmlformats.org/officeDocument/2006/relationships" xmlns:a="http://schemas.openxmlformats.org/drawingml/2006/main" r:embed="Ra8090b67fdf141c8"/>
           <a:stretch xmlns:a="http://schemas.openxmlformats.org/drawingml/2006/main"/>
         </p:blipFill>
         <p:spPr>
@@ -1451,7 +1451,7 @@
           <p:nvPr/>
         </p:nvPicPr>
         <p:blipFill rotWithShape="1">
-          <a:blip xmlns:r="http://schemas.openxmlformats.org/officeDocument/2006/relationships" xmlns:a="http://schemas.openxmlformats.org/drawingml/2006/main" r:embed="R2b569099c4f24163">
+          <a:blip xmlns:r="http://schemas.openxmlformats.org/officeDocument/2006/relationships" xmlns:a="http://schemas.openxmlformats.org/drawingml/2006/main" r:embed="R278670a56bc0419a">
             <a:alphaModFix amt="28000"/>
           </a:blip>
           <a:stretch xmlns:a="http://schemas.openxmlformats.org/drawingml/2006/main"/>
@@ -1664,7 +1664,7 @@
           <p:nvPr/>
         </p:nvPicPr>
         <p:blipFill rotWithShape="1">
-          <a:blip xmlns:r="http://schemas.openxmlformats.org/officeDocument/2006/relationships" xmlns:a="http://schemas.openxmlformats.org/drawingml/2006/main" r:embed="R9e7d0dd1bc004f0d">
+          <a:blip xmlns:r="http://schemas.openxmlformats.org/officeDocument/2006/relationships" xmlns:a="http://schemas.openxmlformats.org/drawingml/2006/main" r:embed="R5baf8f4e3fa24315">
             <a:alphaModFix amt="28000"/>
           </a:blip>
           <a:stretch xmlns:a="http://schemas.openxmlformats.org/drawingml/2006/main"/>
@@ -1899,7 +1899,7 @@
           <p:nvPr/>
         </p:nvPicPr>
         <p:blipFill rotWithShape="1">
-          <a:blip xmlns:r="http://schemas.openxmlformats.org/officeDocument/2006/relationships" xmlns:a="http://schemas.openxmlformats.org/drawingml/2006/main" r:embed="R2fb09560a1b345b2">
+          <a:blip xmlns:r="http://schemas.openxmlformats.org/officeDocument/2006/relationships" xmlns:a="http://schemas.openxmlformats.org/drawingml/2006/main" r:embed="R6dd2d92700b342ff">
             <a:alphaModFix amt="28000"/>
           </a:blip>
           <a:stretch xmlns:a="http://schemas.openxmlformats.org/drawingml/2006/main"/>
@@ -2176,7 +2176,7 @@
           <p:nvPr/>
         </p:nvPicPr>
         <p:blipFill rotWithShape="1">
-          <a:blip xmlns:r="http://schemas.openxmlformats.org/officeDocument/2006/relationships" xmlns:a="http://schemas.openxmlformats.org/drawingml/2006/main" r:embed="R56ec0681cd5b4735">
+          <a:blip xmlns:r="http://schemas.openxmlformats.org/officeDocument/2006/relationships" xmlns:a="http://schemas.openxmlformats.org/drawingml/2006/main" r:embed="Rb7083afa006a4a0d">
             <a:alphaModFix amt="28000"/>
           </a:blip>
           <a:stretch xmlns:a="http://schemas.openxmlformats.org/drawingml/2006/main"/>
@@ -2451,7 +2451,7 @@
           <p:nvPr/>
         </p:nvPicPr>
         <p:blipFill rotWithShape="1">
-          <a:blip xmlns:r="http://schemas.openxmlformats.org/officeDocument/2006/relationships" xmlns:a="http://schemas.openxmlformats.org/drawingml/2006/main" r:embed="Rcd4c727e2b834d58">
+          <a:blip xmlns:r="http://schemas.openxmlformats.org/officeDocument/2006/relationships" xmlns:a="http://schemas.openxmlformats.org/drawingml/2006/main" r:embed="R99c1dfa3b1e4419f">
             <a:alphaModFix amt="28000"/>
           </a:blip>
           <a:stretch xmlns:a="http://schemas.openxmlformats.org/drawingml/2006/main"/>
@@ -2875,7 +2875,7 @@
           <p:nvPr/>
         </p:nvPicPr>
         <p:blipFill rotWithShape="1">
-          <a:blip xmlns:r="http://schemas.openxmlformats.org/officeDocument/2006/relationships" xmlns:a="http://schemas.openxmlformats.org/drawingml/2006/main" r:embed="Rd86a9c456831401d">
+          <a:blip xmlns:r="http://schemas.openxmlformats.org/officeDocument/2006/relationships" xmlns:a="http://schemas.openxmlformats.org/drawingml/2006/main" r:embed="Rec569104aee749dc">
             <a:alphaModFix amt="28000"/>
           </a:blip>
           <a:stretch xmlns:a="http://schemas.openxmlformats.org/drawingml/2006/main"/>
@@ -3016,7 +3016,7 @@
           <p:nvPr/>
         </p:nvPicPr>
         <p:blipFill rotWithShape="1">
-          <a:blip xmlns:r="http://schemas.openxmlformats.org/officeDocument/2006/relationships" xmlns:a="http://schemas.openxmlformats.org/drawingml/2006/main" r:embed="R5035dd466aa54bad">
+          <a:blip xmlns:r="http://schemas.openxmlformats.org/officeDocument/2006/relationships" xmlns:a="http://schemas.openxmlformats.org/drawingml/2006/main" r:embed="Re7bf5e94836d47d5">
             <a:alphaModFix amt="28000"/>
           </a:blip>
           <a:stretch xmlns:a="http://schemas.openxmlformats.org/drawingml/2006/main"/>
@@ -3130,7 +3130,7 @@
           <p:nvPr/>
         </p:nvPicPr>
         <p:blipFill rotWithShape="1">
-          <a:blip xmlns:r="http://schemas.openxmlformats.org/officeDocument/2006/relationships" xmlns:a="http://schemas.openxmlformats.org/drawingml/2006/main" r:embed="R7738ff08ec7a4428">
+          <a:blip xmlns:r="http://schemas.openxmlformats.org/officeDocument/2006/relationships" xmlns:a="http://schemas.openxmlformats.org/drawingml/2006/main" r:embed="R8244c3680a814ee4">
             <a:alphaModFix amt="28000"/>
           </a:blip>
           <a:stretch xmlns:a="http://schemas.openxmlformats.org/drawingml/2006/main"/>
@@ -3457,7 +3457,7 @@
           <p:nvPr/>
         </p:nvPicPr>
         <p:blipFill rotWithShape="1">
-          <a:blip xmlns:r="http://schemas.openxmlformats.org/officeDocument/2006/relationships" xmlns:a="http://schemas.openxmlformats.org/drawingml/2006/main" r:embed="R9e3d36952e264b5c">
+          <a:blip xmlns:r="http://schemas.openxmlformats.org/officeDocument/2006/relationships" xmlns:a="http://schemas.openxmlformats.org/drawingml/2006/main" r:embed="Rfabdb862b48f45b2">
             <a:alphaModFix amt="28000"/>
           </a:blip>
           <a:stretch xmlns:a="http://schemas.openxmlformats.org/drawingml/2006/main"/>
@@ -3745,7 +3745,7 @@
           <p:nvPr/>
         </p:nvPicPr>
         <p:blipFill rotWithShape="1">
-          <a:blip xmlns:r="http://schemas.openxmlformats.org/officeDocument/2006/relationships" xmlns:a="http://schemas.openxmlformats.org/drawingml/2006/main" r:embed="R384e7f4bbf724d05">
+          <a:blip xmlns:r="http://schemas.openxmlformats.org/officeDocument/2006/relationships" xmlns:a="http://schemas.openxmlformats.org/drawingml/2006/main" r:embed="R58efb17c35664933">
             <a:alphaModFix amt="28000"/>
           </a:blip>
           <a:stretch xmlns:a="http://schemas.openxmlformats.org/drawingml/2006/main"/>
@@ -3982,17 +3982,17 @@
   </p:cSld>
   <p:clrMap bg1="lt1" tx1="dk1" bg2="lt2" tx2="dk2" accent1="accent1" accent2="accent2" accent3="accent3" accent4="accent4" accent5="accent5" accent6="accent6" hlink="hlink" folHlink="folHlink"/>
   <p:sldLayoutIdLst>
-    <p:sldLayoutId xmlns:r="http://schemas.openxmlformats.org/officeDocument/2006/relationships" id="2147483649" r:id="Rc76d3b0678bd4326"/>
-    <p:sldLayoutId xmlns:r="http://schemas.openxmlformats.org/officeDocument/2006/relationships" id="2147483650" r:id="R07fe1f16c9f84e1f"/>
-    <p:sldLayoutId xmlns:r="http://schemas.openxmlformats.org/officeDocument/2006/relationships" id="2147483651" r:id="R0c4331fc2737436e"/>
-    <p:sldLayoutId xmlns:r="http://schemas.openxmlformats.org/officeDocument/2006/relationships" id="2147483652" r:id="R64bdb53c93fa42f2"/>
-    <p:sldLayoutId xmlns:r="http://schemas.openxmlformats.org/officeDocument/2006/relationships" id="2147483653" r:id="R120cbbf6f68f455b"/>
-    <p:sldLayoutId xmlns:r="http://schemas.openxmlformats.org/officeDocument/2006/relationships" id="2147483654" r:id="R6cce2df947c546f1"/>
-    <p:sldLayoutId xmlns:r="http://schemas.openxmlformats.org/officeDocument/2006/relationships" id="2147483655" r:id="Rd88cfb9ab3b54310"/>
-    <p:sldLayoutId xmlns:r="http://schemas.openxmlformats.org/officeDocument/2006/relationships" id="2147483656" r:id="R13a923f5b7374835"/>
-    <p:sldLayoutId xmlns:r="http://schemas.openxmlformats.org/officeDocument/2006/relationships" id="2147483657" r:id="R181ff3d1d95f4512"/>
-    <p:sldLayoutId xmlns:r="http://schemas.openxmlformats.org/officeDocument/2006/relationships" id="2147483658" r:id="R323ca8a109404372"/>
-    <p:sldLayoutId xmlns:r="http://schemas.openxmlformats.org/officeDocument/2006/relationships" id="2147483659" r:id="R1ba5a54b6209426e"/>
+    <p:sldLayoutId xmlns:r="http://schemas.openxmlformats.org/officeDocument/2006/relationships" id="2147483649" r:id="R5c189b324a2f423a"/>
+    <p:sldLayoutId xmlns:r="http://schemas.openxmlformats.org/officeDocument/2006/relationships" id="2147483650" r:id="Rf7108cc102d94534"/>
+    <p:sldLayoutId xmlns:r="http://schemas.openxmlformats.org/officeDocument/2006/relationships" id="2147483651" r:id="Ra7ca180b225d4f87"/>
+    <p:sldLayoutId xmlns:r="http://schemas.openxmlformats.org/officeDocument/2006/relationships" id="2147483652" r:id="R2af55c1fb458490f"/>
+    <p:sldLayoutId xmlns:r="http://schemas.openxmlformats.org/officeDocument/2006/relationships" id="2147483653" r:id="R002f92d8391c4e5b"/>
+    <p:sldLayoutId xmlns:r="http://schemas.openxmlformats.org/officeDocument/2006/relationships" id="2147483654" r:id="Recf2fb49e52c49d2"/>
+    <p:sldLayoutId xmlns:r="http://schemas.openxmlformats.org/officeDocument/2006/relationships" id="2147483655" r:id="Rb0ed6eed446549cb"/>
+    <p:sldLayoutId xmlns:r="http://schemas.openxmlformats.org/officeDocument/2006/relationships" id="2147483656" r:id="R83cce79761524475"/>
+    <p:sldLayoutId xmlns:r="http://schemas.openxmlformats.org/officeDocument/2006/relationships" id="2147483657" r:id="Rea1b037000414cdb"/>
+    <p:sldLayoutId xmlns:r="http://schemas.openxmlformats.org/officeDocument/2006/relationships" id="2147483658" r:id="R3e3c5c8979d04e17"/>
+    <p:sldLayoutId xmlns:r="http://schemas.openxmlformats.org/officeDocument/2006/relationships" id="2147483659" r:id="Rde343731d45b4c2b"/>
   </p:sldLayoutIdLst>
   <p:hf hdr="0" ftr="0" dt="0"/>
   <p:txStyles>
